--- a/DataShare_Presentation.pptx
+++ b/DataShare_Presentation.pptx
@@ -7,18 +7,20 @@
   <p:sldIdLst>
     <p:sldId id="256" r:id="rId2"/>
     <p:sldId id="257" r:id="rId3"/>
-    <p:sldId id="258" r:id="rId4"/>
+    <p:sldId id="271" r:id="rId4"/>
     <p:sldId id="259" r:id="rId5"/>
-    <p:sldId id="260" r:id="rId6"/>
-    <p:sldId id="268" r:id="rId7"/>
-    <p:sldId id="269" r:id="rId8"/>
+    <p:sldId id="272" r:id="rId6"/>
+    <p:sldId id="273" r:id="rId7"/>
+    <p:sldId id="274" r:id="rId8"/>
     <p:sldId id="262" r:id="rId9"/>
-    <p:sldId id="261" r:id="rId10"/>
-    <p:sldId id="263" r:id="rId11"/>
-    <p:sldId id="264" r:id="rId12"/>
-    <p:sldId id="265" r:id="rId13"/>
-    <p:sldId id="266" r:id="rId14"/>
-    <p:sldId id="267" r:id="rId15"/>
+    <p:sldId id="275" r:id="rId10"/>
+    <p:sldId id="261" r:id="rId11"/>
+    <p:sldId id="276" r:id="rId12"/>
+    <p:sldId id="263" r:id="rId13"/>
+    <p:sldId id="264" r:id="rId14"/>
+    <p:sldId id="265" r:id="rId15"/>
+    <p:sldId id="266" r:id="rId16"/>
+    <p:sldId id="267" r:id="rId17"/>
   </p:sldIdLst>
   <p:sldSz cx="9144000" cy="6858000" type="screen4x3"/>
   <p:notesSz cx="6858000" cy="9144000"/>
@@ -317,7 +319,7 @@
           <a:p>
             <a:fld id="{5BCAD085-E8A6-8845-BD4E-CB4CCA059FC4}" type="datetimeFigureOut">
               <a:rPr lang="en-US" smtClean="0"/>
-              <a:t>4/20/2026</a:t>
+              <a:t>5/2/2026</a:t>
             </a:fld>
             <a:endParaRPr lang="en-US"/>
           </a:p>
@@ -487,7 +489,7 @@
           <a:p>
             <a:fld id="{5BCAD085-E8A6-8845-BD4E-CB4CCA059FC4}" type="datetimeFigureOut">
               <a:rPr lang="en-US" smtClean="0"/>
-              <a:t>4/20/2026</a:t>
+              <a:t>5/2/2026</a:t>
             </a:fld>
             <a:endParaRPr lang="en-US"/>
           </a:p>
@@ -667,7 +669,7 @@
           <a:p>
             <a:fld id="{5BCAD085-E8A6-8845-BD4E-CB4CCA059FC4}" type="datetimeFigureOut">
               <a:rPr lang="en-US" smtClean="0"/>
-              <a:t>4/20/2026</a:t>
+              <a:t>5/2/2026</a:t>
             </a:fld>
             <a:endParaRPr lang="en-US"/>
           </a:p>
@@ -837,7 +839,7 @@
           <a:p>
             <a:fld id="{5BCAD085-E8A6-8845-BD4E-CB4CCA059FC4}" type="datetimeFigureOut">
               <a:rPr lang="en-US" smtClean="0"/>
-              <a:t>4/20/2026</a:t>
+              <a:t>5/2/2026</a:t>
             </a:fld>
             <a:endParaRPr lang="en-US"/>
           </a:p>
@@ -1083,7 +1085,7 @@
           <a:p>
             <a:fld id="{5BCAD085-E8A6-8845-BD4E-CB4CCA059FC4}" type="datetimeFigureOut">
               <a:rPr lang="en-US" smtClean="0"/>
-              <a:t>4/20/2026</a:t>
+              <a:t>5/2/2026</a:t>
             </a:fld>
             <a:endParaRPr lang="en-US"/>
           </a:p>
@@ -1371,7 +1373,7 @@
           <a:p>
             <a:fld id="{5BCAD085-E8A6-8845-BD4E-CB4CCA059FC4}" type="datetimeFigureOut">
               <a:rPr lang="en-US" smtClean="0"/>
-              <a:t>4/20/2026</a:t>
+              <a:t>5/2/2026</a:t>
             </a:fld>
             <a:endParaRPr lang="en-US"/>
           </a:p>
@@ -1793,7 +1795,7 @@
           <a:p>
             <a:fld id="{5BCAD085-E8A6-8845-BD4E-CB4CCA059FC4}" type="datetimeFigureOut">
               <a:rPr lang="en-US" smtClean="0"/>
-              <a:t>4/20/2026</a:t>
+              <a:t>5/2/2026</a:t>
             </a:fld>
             <a:endParaRPr lang="en-US"/>
           </a:p>
@@ -1911,7 +1913,7 @@
           <a:p>
             <a:fld id="{5BCAD085-E8A6-8845-BD4E-CB4CCA059FC4}" type="datetimeFigureOut">
               <a:rPr lang="en-US" smtClean="0"/>
-              <a:t>4/20/2026</a:t>
+              <a:t>5/2/2026</a:t>
             </a:fld>
             <a:endParaRPr lang="en-US"/>
           </a:p>
@@ -2006,7 +2008,7 @@
           <a:p>
             <a:fld id="{5BCAD085-E8A6-8845-BD4E-CB4CCA059FC4}" type="datetimeFigureOut">
               <a:rPr lang="en-US" smtClean="0"/>
-              <a:t>4/20/2026</a:t>
+              <a:t>5/2/2026</a:t>
             </a:fld>
             <a:endParaRPr lang="en-US"/>
           </a:p>
@@ -2283,7 +2285,7 @@
           <a:p>
             <a:fld id="{5BCAD085-E8A6-8845-BD4E-CB4CCA059FC4}" type="datetimeFigureOut">
               <a:rPr lang="en-US" smtClean="0"/>
-              <a:t>4/20/2026</a:t>
+              <a:t>5/2/2026</a:t>
             </a:fld>
             <a:endParaRPr lang="en-US"/>
           </a:p>
@@ -2536,7 +2538,7 @@
           <a:p>
             <a:fld id="{5BCAD085-E8A6-8845-BD4E-CB4CCA059FC4}" type="datetimeFigureOut">
               <a:rPr lang="en-US" smtClean="0"/>
-              <a:t>4/20/2026</a:t>
+              <a:t>5/2/2026</a:t>
             </a:fld>
             <a:endParaRPr lang="en-US"/>
           </a:p>
@@ -2749,7 +2751,7 @@
           <a:p>
             <a:fld id="{5BCAD085-E8A6-8845-BD4E-CB4CCA059FC4}" type="datetimeFigureOut">
               <a:rPr lang="en-US" smtClean="0"/>
-              <a:t>4/20/2026</a:t>
+              <a:t>5/2/2026</a:t>
             </a:fld>
             <a:endParaRPr lang="en-US"/>
           </a:p>
@@ -3145,7 +3147,7 @@
           <a:lstStyle/>
           <a:p>
             <a:r>
-              <a:rPr dirty="0" err="1" smtClean="0"/>
+              <a:rPr lang="fr-FR" dirty="0" err="1"/>
               <a:t>DataShare</a:t>
             </a:r>
             <a:endParaRPr dirty="0"/>
@@ -3164,81 +3166,51 @@
         </p:nvSpPr>
         <p:spPr>
           <a:xfrm>
-            <a:off x="1371600" y="2616959"/>
-            <a:ext cx="6400800" cy="1752600"/>
+            <a:off x="379562" y="2616959"/>
+            <a:ext cx="8315864" cy="1752600"/>
           </a:xfrm>
         </p:spPr>
         <p:txBody>
           <a:bodyPr/>
           <a:lstStyle/>
           <a:p>
-            <a:r>
-              <a:rPr dirty="0" err="1" smtClean="0">
+            <a:pPr marL="342900" lvl="0" indent="-342900" algn="l">
+              <a:buFont typeface="Arial"/>
+              <a:buChar char="•"/>
+            </a:pPr>
+            <a:r>
+              <a:rPr lang="fr-FR" dirty="0">
                 <a:solidFill>
-                  <a:schemeClr val="tx1"/>
+                  <a:prstClr val="black"/>
                 </a:solidFill>
               </a:rPr>
-              <a:t>Plateforme</a:t>
-            </a:r>
-            <a:r>
-              <a:rPr dirty="0" smtClean="0">
+              <a:t>Plateforme de partage de fichiers sécurisée</a:t>
+            </a:r>
+          </a:p>
+          <a:p>
+            <a:pPr marL="342900" lvl="0" indent="-342900" algn="l">
+              <a:buFont typeface="Arial"/>
+              <a:buChar char="•"/>
+            </a:pPr>
+            <a:r>
+              <a:rPr lang="fr-FR" dirty="0">
                 <a:solidFill>
-                  <a:schemeClr val="tx1"/>
+                  <a:prstClr val="black"/>
                 </a:solidFill>
               </a:rPr>
-              <a:t> </a:t>
-            </a:r>
-            <a:r>
-              <a:rPr dirty="0">
+              <a:t>Présentation </a:t>
+            </a:r>
+            <a:r>
+              <a:rPr lang="fr-FR" dirty="0" smtClean="0">
                 <a:solidFill>
-                  <a:schemeClr val="tx1"/>
+                  <a:prstClr val="black"/>
                 </a:solidFill>
               </a:rPr>
-              <a:t>de </a:t>
-            </a:r>
-            <a:r>
-              <a:rPr dirty="0" err="1">
-                <a:solidFill>
-                  <a:schemeClr val="tx1"/>
-                </a:solidFill>
-              </a:rPr>
-              <a:t>partage</a:t>
-            </a:r>
-            <a:r>
-              <a:rPr dirty="0">
-                <a:solidFill>
-                  <a:schemeClr val="tx1"/>
-                </a:solidFill>
-              </a:rPr>
-              <a:t> de </a:t>
-            </a:r>
-            <a:r>
-              <a:rPr dirty="0" err="1">
-                <a:solidFill>
-                  <a:schemeClr val="tx1"/>
-                </a:solidFill>
-              </a:rPr>
-              <a:t>fichiers</a:t>
-            </a:r>
-            <a:r>
-              <a:rPr dirty="0">
-                <a:solidFill>
-                  <a:schemeClr val="tx1"/>
-                </a:solidFill>
-              </a:rPr>
-              <a:t> </a:t>
-            </a:r>
-            <a:r>
-              <a:rPr dirty="0" err="1" smtClean="0">
-                <a:solidFill>
-                  <a:schemeClr val="tx1"/>
-                </a:solidFill>
-              </a:rPr>
-              <a:t>sécurisée</a:t>
-            </a:r>
-            <a:endParaRPr dirty="0">
+              <a:t>prototype</a:t>
+            </a:r>
+            <a:endParaRPr lang="fr-FR" dirty="0">
               <a:solidFill>
-                <a:schemeClr val="tx1"/>
+                <a:prstClr val="black"/>
               </a:solidFill>
             </a:endParaRPr>
           </a:p>
@@ -3292,16 +3264,8 @@
           <a:lstStyle/>
           <a:p>
             <a:r>
-              <a:rPr lang="fr-FR" b="1" dirty="0"/>
-              <a:t>Documentation API (</a:t>
-            </a:r>
-            <a:r>
-              <a:rPr lang="fr-FR" b="1" dirty="0" err="1"/>
-              <a:t>Swagger</a:t>
-            </a:r>
-            <a:r>
-              <a:rPr lang="fr-FR" b="1" dirty="0"/>
-              <a:t>)</a:t>
+              <a:rPr dirty="0" err="1"/>
+              <a:t>Sécurité</a:t>
             </a:r>
             <a:endParaRPr dirty="0"/>
           </a:p>
@@ -3328,60 +3292,46 @@
               <a:buNone/>
             </a:pPr>
             <a:r>
-              <a:rPr lang="fr-FR" sz="2400" dirty="0" smtClean="0"/>
-              <a:t>Accessible </a:t>
-            </a:r>
-            <a:r>
-              <a:rPr lang="fr-FR" sz="2400" dirty="0"/>
-              <a:t>: </a:t>
-            </a:r>
-            <a:r>
-              <a:rPr lang="fr-FR" sz="2400" dirty="0">
-                <a:hlinkClick r:id="rId2"/>
+              <a:rPr lang="fr-FR" dirty="0">
+                <a:solidFill>
+                  <a:srgbClr val="FF0000"/>
+                </a:solidFill>
               </a:rPr>
-              <a:t>http://</a:t>
-            </a:r>
-            <a:r>
-              <a:rPr lang="fr-FR" sz="2400" dirty="0" smtClean="0">
-                <a:hlinkClick r:id="rId2"/>
+              <a:t>Mesures </a:t>
+            </a:r>
+            <a:r>
+              <a:rPr lang="fr-FR" dirty="0" smtClean="0">
+                <a:solidFill>
+                  <a:srgbClr val="FF0000"/>
+                </a:solidFill>
               </a:rPr>
-              <a:t>localhost:8080/swagger-ui/index.html</a:t>
-            </a:r>
-            <a:endParaRPr lang="fr-FR" sz="2400" dirty="0" smtClean="0"/>
+              <a:t>implémentées:</a:t>
+            </a:r>
+            <a:endParaRPr lang="fr-FR" dirty="0">
+              <a:solidFill>
+                <a:srgbClr val="FF0000"/>
+              </a:solidFill>
+            </a:endParaRPr>
           </a:p>
           <a:p>
             <a:pPr marL="0" indent="0">
               <a:buNone/>
             </a:pPr>
             <a:r>
-              <a:rPr lang="fr-FR" sz="2400" b="1" dirty="0" smtClean="0"/>
-              <a:t>Authentification</a:t>
-            </a:r>
-            <a:endParaRPr lang="fr-FR" sz="2400" dirty="0"/>
-          </a:p>
-          <a:p>
-            <a:r>
-              <a:rPr lang="fr-FR" sz="2400" dirty="0" smtClean="0"/>
-              <a:t>POST </a:t>
-            </a:r>
-            <a:r>
-              <a:rPr lang="fr-FR" sz="2400" dirty="0"/>
-              <a:t>/api/</a:t>
-            </a:r>
-            <a:r>
-              <a:rPr lang="fr-FR" sz="2400" dirty="0" err="1"/>
-              <a:t>register</a:t>
-            </a:r>
-            <a:endParaRPr lang="fr-FR" sz="2400" dirty="0"/>
-          </a:p>
-          <a:p>
-            <a:r>
-              <a:rPr lang="fr-FR" sz="2400" dirty="0" smtClean="0"/>
-              <a:t>POST </a:t>
-            </a:r>
-            <a:r>
-              <a:rPr lang="fr-FR" sz="2400" dirty="0"/>
-              <a:t>/api/login</a:t>
+              <a:rPr lang="fr-FR" sz="2800" dirty="0"/>
+              <a:t>• Authentification sécurisée via JWT + </a:t>
+            </a:r>
+            <a:r>
+              <a:rPr lang="fr-FR" sz="2800" dirty="0" err="1"/>
+              <a:t>Spring</a:t>
+            </a:r>
+            <a:r>
+              <a:rPr lang="fr-FR" sz="2800" dirty="0"/>
+              <a:t> </a:t>
+            </a:r>
+            <a:r>
+              <a:rPr lang="fr-FR" sz="2800" dirty="0" smtClean="0"/>
+              <a:t>Security</a:t>
             </a:r>
           </a:p>
           <a:p>
@@ -3389,100 +3339,84 @@
               <a:buNone/>
             </a:pPr>
             <a:r>
-              <a:rPr lang="fr-FR" sz="2400" b="1" dirty="0"/>
-              <a:t>Gestion des fichiers</a:t>
-            </a:r>
-            <a:endParaRPr lang="fr-FR" sz="2400" dirty="0"/>
-          </a:p>
-          <a:p>
-            <a:r>
-              <a:rPr lang="fr-FR" sz="2400" dirty="0"/>
-              <a:t>POST /api/files/</a:t>
-            </a:r>
-            <a:r>
-              <a:rPr lang="fr-FR" sz="2400" dirty="0" err="1"/>
-              <a:t>upload</a:t>
-            </a:r>
-            <a:endParaRPr lang="fr-FR" sz="2400" dirty="0"/>
-          </a:p>
-          <a:p>
-            <a:r>
-              <a:rPr lang="fr-FR" sz="2400" dirty="0" smtClean="0"/>
-              <a:t>GET </a:t>
-            </a:r>
-            <a:r>
-              <a:rPr lang="fr-FR" sz="2400" dirty="0"/>
-              <a:t>/api/files/</a:t>
-            </a:r>
-            <a:r>
-              <a:rPr lang="fr-FR" sz="2400" dirty="0" err="1"/>
-              <a:t>download</a:t>
-            </a:r>
-            <a:r>
-              <a:rPr lang="fr-FR" sz="2400" dirty="0"/>
-              <a:t>/{</a:t>
-            </a:r>
-            <a:r>
-              <a:rPr lang="fr-FR" sz="2400" dirty="0" err="1" smtClean="0"/>
-              <a:t>token</a:t>
-            </a:r>
-            <a:r>
-              <a:rPr lang="fr-FR" sz="2400" dirty="0" smtClean="0"/>
-              <a:t>}</a:t>
-            </a:r>
-            <a:endParaRPr lang="fr-FR" sz="2400" dirty="0"/>
-          </a:p>
-          <a:p>
-            <a:r>
-              <a:rPr lang="fr-FR" sz="2400" dirty="0" smtClean="0"/>
-              <a:t>GET </a:t>
-            </a:r>
-            <a:r>
-              <a:rPr lang="fr-FR" sz="2400" dirty="0"/>
-              <a:t>/api/files/</a:t>
-            </a:r>
-            <a:r>
-              <a:rPr lang="fr-FR" sz="2400" dirty="0" err="1"/>
-              <a:t>my</a:t>
-            </a:r>
-            <a:r>
-              <a:rPr lang="fr-FR" sz="2400" dirty="0"/>
-              <a:t>-files</a:t>
-            </a:r>
-          </a:p>
-          <a:p>
-            <a:r>
-              <a:rPr lang="fr-FR" sz="2400" dirty="0" smtClean="0"/>
-              <a:t>DELETE </a:t>
-            </a:r>
-            <a:r>
-              <a:rPr lang="fr-FR" sz="2400" dirty="0"/>
-              <a:t>/api/files/{id}</a:t>
-            </a:r>
-          </a:p>
-          <a:p>
-            <a:r>
-              <a:rPr lang="fr-FR" sz="2400" dirty="0" smtClean="0"/>
-              <a:t>GET </a:t>
-            </a:r>
-            <a:r>
-              <a:rPr lang="fr-FR" sz="2400" dirty="0"/>
-              <a:t>/api/files/info/{</a:t>
-            </a:r>
-            <a:r>
-              <a:rPr lang="fr-FR" sz="2400" dirty="0" err="1"/>
-              <a:t>token</a:t>
-            </a:r>
-            <a:r>
-              <a:rPr lang="fr-FR" sz="2400" dirty="0"/>
-              <a:t>}</a:t>
-            </a:r>
+              <a:rPr lang="fr-FR" sz="2800" dirty="0"/>
+              <a:t>• Mots de passe hachés avec </a:t>
+            </a:r>
+            <a:r>
+              <a:rPr lang="fr-FR" sz="2800" dirty="0" err="1" smtClean="0"/>
+              <a:t>Bcrypt</a:t>
+            </a:r>
+            <a:endParaRPr lang="fr-FR" sz="2800" dirty="0" smtClean="0"/>
           </a:p>
           <a:p>
             <a:pPr marL="0" indent="0">
               <a:buNone/>
             </a:pPr>
-            <a:endParaRPr sz="2400" dirty="0"/>
+            <a:r>
+              <a:rPr lang="fr-FR" sz="2800" dirty="0" smtClean="0"/>
+              <a:t>• Block des fichier avec extensions (.</a:t>
+            </a:r>
+            <a:r>
+              <a:rPr lang="fr-FR" sz="2800" dirty="0" err="1" smtClean="0"/>
+              <a:t>exe</a:t>
+            </a:r>
+            <a:r>
+              <a:rPr lang="fr-FR" sz="2800" dirty="0" smtClean="0"/>
+              <a:t>, .bat, .cmd)</a:t>
+            </a:r>
+          </a:p>
+          <a:p>
+            <a:pPr marL="0" indent="0">
+              <a:buNone/>
+            </a:pPr>
+            <a:r>
+              <a:rPr lang="fr-FR" sz="2800" dirty="0"/>
+              <a:t>• Configuration CORS sécurisée pour limiter les accès </a:t>
+            </a:r>
+            <a:r>
+              <a:rPr lang="fr-FR" sz="2800" dirty="0" smtClean="0"/>
+              <a:t>externes</a:t>
+            </a:r>
+          </a:p>
+          <a:p>
+            <a:pPr marL="0" indent="0">
+              <a:buNone/>
+            </a:pPr>
+            <a:r>
+              <a:rPr lang="fr-FR" sz="2800" dirty="0"/>
+              <a:t>•Protection des routes côté </a:t>
+            </a:r>
+            <a:r>
+              <a:rPr lang="fr-FR" sz="2800" dirty="0" err="1"/>
+              <a:t>frontend</a:t>
+            </a:r>
+            <a:r>
+              <a:rPr lang="fr-FR" sz="2800" dirty="0"/>
+              <a:t> avec </a:t>
+            </a:r>
+            <a:r>
+              <a:rPr lang="fr-FR" sz="2800" dirty="0" err="1" smtClean="0"/>
+              <a:t>AuthGuard</a:t>
+            </a:r>
+            <a:endParaRPr lang="fr-FR" sz="2800" dirty="0" smtClean="0"/>
+          </a:p>
+          <a:p>
+            <a:pPr marL="0" indent="0">
+              <a:buNone/>
+            </a:pPr>
+            <a:r>
+              <a:rPr lang="fr-FR" sz="2800" dirty="0"/>
+              <a:t>• Utilisation de </a:t>
+            </a:r>
+            <a:r>
+              <a:rPr lang="fr-FR" sz="2800" dirty="0" err="1"/>
+              <a:t>tokens</a:t>
+            </a:r>
+            <a:r>
+              <a:rPr lang="fr-FR" sz="2800" dirty="0"/>
+              <a:t> JWT avec expiration pour limiter les risques de session compromise</a:t>
+            </a:r>
+            <a:endParaRPr sz="2800" dirty="0"/>
           </a:p>
         </p:txBody>
       </p:sp>
@@ -3521,19 +3455,16 @@
             <p:ph type="title"/>
           </p:nvPr>
         </p:nvSpPr>
-        <p:spPr>
-          <a:xfrm>
-            <a:off x="457200" y="260991"/>
-            <a:ext cx="8229600" cy="1143000"/>
-          </a:xfrm>
-        </p:spPr>
-        <p:txBody>
-          <a:bodyPr/>
-          <a:lstStyle/>
-          <a:p>
-            <a:r>
-              <a:t>Qualité &amp; tests</a:t>
-            </a:r>
+        <p:spPr/>
+        <p:txBody>
+          <a:bodyPr/>
+          <a:lstStyle/>
+          <a:p>
+            <a:r>
+              <a:rPr dirty="0" err="1" smtClean="0"/>
+              <a:t>Démonstration</a:t>
+            </a:r>
+            <a:endParaRPr dirty="0"/>
           </a:p>
         </p:txBody>
       </p:sp>
@@ -3547,143 +3478,112 @@
             <p:ph idx="1"/>
           </p:nvPr>
         </p:nvSpPr>
-        <p:spPr>
-          <a:xfrm>
-            <a:off x="457200" y="1801504"/>
-            <a:ext cx="8229600" cy="4324659"/>
-          </a:xfrm>
-        </p:spPr>
-        <p:txBody>
-          <a:bodyPr/>
-          <a:lstStyle/>
-          <a:p>
-            <a:pPr marL="0" indent="0">
-              <a:buNone/>
-            </a:pPr>
+        <p:spPr/>
+        <p:txBody>
+          <a:bodyPr>
+            <a:normAutofit fontScale="92500" lnSpcReduction="10000"/>
+          </a:bodyPr>
+          <a:lstStyle/>
+          <a:p>
             <a:r>
               <a:rPr lang="fr-FR" dirty="0" smtClean="0"/>
-              <a:t>Réalisation 3 type de tests:</a:t>
-            </a:r>
-          </a:p>
-          <a:p>
-            <a:r>
-              <a:rPr lang="fr-FR" sz="2800" dirty="0" smtClean="0"/>
-              <a:t>Test unitaire </a:t>
-            </a:r>
-            <a:r>
-              <a:rPr lang="fr-FR" sz="2800" dirty="0"/>
-              <a:t>vérification des composants </a:t>
-            </a:r>
-            <a:endParaRPr lang="fr-FR" sz="2800" dirty="0" smtClean="0"/>
-          </a:p>
-          <a:p>
-            <a:r>
-              <a:rPr lang="fr-FR" sz="2800" dirty="0" smtClean="0"/>
-              <a:t>Test </a:t>
-            </a:r>
-            <a:r>
-              <a:rPr lang="fr-FR" sz="2800" dirty="0" err="1" smtClean="0"/>
-              <a:t>integration</a:t>
-            </a:r>
-            <a:r>
-              <a:rPr lang="fr-FR" sz="2800" dirty="0" smtClean="0"/>
+              <a:t>Inscription nouveau </a:t>
+            </a:r>
+            <a:r>
+              <a:rPr lang="fr-FR" dirty="0"/>
+              <a:t>utilisateur</a:t>
+            </a:r>
+            <a:endParaRPr lang="fr-FR" dirty="0" smtClean="0"/>
+          </a:p>
+          <a:p>
+            <a:r>
+              <a:rPr dirty="0" smtClean="0"/>
+              <a:t>Login </a:t>
+            </a:r>
+            <a:r>
+              <a:rPr dirty="0" err="1"/>
+              <a:t>utilisateur</a:t>
+            </a:r>
+            <a:endParaRPr dirty="0"/>
+          </a:p>
+          <a:p>
+            <a:r>
+              <a:rPr dirty="0"/>
+              <a:t>Upload </a:t>
+            </a:r>
+            <a:r>
+              <a:rPr dirty="0" err="1"/>
+              <a:t>fichier</a:t>
+            </a:r>
+            <a:endParaRPr dirty="0"/>
+          </a:p>
+          <a:p>
+            <a:r>
+              <a:rPr dirty="0" err="1"/>
+              <a:t>Génération</a:t>
+            </a:r>
+            <a:r>
+              <a:rPr dirty="0"/>
+              <a:t> lien</a:t>
+            </a:r>
+          </a:p>
+          <a:p>
+            <a:r>
+              <a:rPr dirty="0" err="1"/>
+              <a:t>Téléchargement</a:t>
+            </a:r>
+            <a:endParaRPr dirty="0"/>
+          </a:p>
+          <a:p>
+            <a:r>
+              <a:rPr dirty="0" err="1"/>
+              <a:t>Erreur</a:t>
+            </a:r>
+            <a:r>
+              <a:rPr dirty="0"/>
+              <a:t> : </a:t>
+            </a:r>
+            <a:endParaRPr lang="fr-FR" dirty="0" smtClean="0"/>
+          </a:p>
+          <a:p>
+            <a:pPr lvl="1"/>
+            <a:r>
+              <a:rPr dirty="0" err="1" smtClean="0"/>
+              <a:t>mauvais</a:t>
+            </a:r>
+            <a:r>
+              <a:rPr dirty="0" smtClean="0"/>
               <a:t> </a:t>
             </a:r>
             <a:r>
-              <a:rPr lang="fr-FR" sz="2800" dirty="0"/>
-              <a:t>validation des </a:t>
-            </a:r>
-            <a:r>
-              <a:rPr lang="fr-FR" sz="2800" dirty="0" err="1"/>
-              <a:t>endpoints</a:t>
-            </a:r>
-            <a:r>
-              <a:rPr lang="fr-FR" sz="2800" dirty="0"/>
-              <a:t> REST </a:t>
-            </a:r>
-            <a:endParaRPr sz="2800" dirty="0"/>
-          </a:p>
-          <a:p>
-            <a:r>
-              <a:rPr lang="fr-FR" sz="2800" dirty="0" smtClean="0"/>
-              <a:t>Test E3E pour simulé le </a:t>
-            </a:r>
-            <a:r>
-              <a:rPr lang="fr-FR" sz="2800" dirty="0"/>
-              <a:t>parcours utilisateur </a:t>
-            </a:r>
-            <a:r>
-              <a:rPr lang="fr-FR" sz="2800" dirty="0" err="1" smtClean="0"/>
-              <a:t>complete</a:t>
-            </a:r>
-            <a:endParaRPr lang="fr-FR" sz="2800" dirty="0" smtClean="0"/>
-          </a:p>
-          <a:p>
-            <a:r>
-              <a:rPr sz="2800" dirty="0" smtClean="0"/>
-              <a:t>Coverage </a:t>
-            </a:r>
-            <a:r>
-              <a:rPr sz="2800" dirty="0"/>
-              <a:t>backend &amp; </a:t>
-            </a:r>
-            <a:r>
-              <a:rPr sz="2800" dirty="0" smtClean="0"/>
-              <a:t>frontend</a:t>
-            </a:r>
-            <a:r>
-              <a:rPr lang="fr-FR" sz="2800" dirty="0"/>
-              <a:t>:</a:t>
-            </a:r>
-            <a:endParaRPr lang="fr-FR" sz="3600" dirty="0" smtClean="0"/>
+              <a:rPr dirty="0"/>
+              <a:t>login </a:t>
+            </a:r>
+            <a:endParaRPr lang="fr-FR" dirty="0" smtClean="0"/>
           </a:p>
           <a:p>
             <a:pPr lvl="1"/>
             <a:r>
-              <a:rPr lang="fr-FR" sz="2400" dirty="0" err="1"/>
-              <a:t>Frontend</a:t>
-            </a:r>
-            <a:r>
-              <a:rPr lang="fr-FR" sz="2400" dirty="0"/>
-              <a:t> : </a:t>
-            </a:r>
-            <a:r>
-              <a:rPr lang="fr-FR" sz="2400" dirty="0" smtClean="0"/>
-              <a:t>75</a:t>
-            </a:r>
-            <a:r>
-              <a:rPr lang="fr-FR" sz="2400" dirty="0"/>
-              <a:t>% de couverture</a:t>
+              <a:rPr lang="fr-FR" dirty="0" smtClean="0"/>
+              <a:t>Mauvais Inscription</a:t>
             </a:r>
           </a:p>
           <a:p>
             <a:pPr lvl="1"/>
             <a:r>
-              <a:rPr lang="fr-FR" sz="2400" dirty="0" err="1"/>
-              <a:t>Backend</a:t>
-            </a:r>
-            <a:r>
-              <a:rPr lang="fr-FR" sz="2400" dirty="0"/>
-              <a:t> : </a:t>
-            </a:r>
-            <a:r>
-              <a:rPr lang="fr-FR" sz="2400" dirty="0" smtClean="0"/>
-              <a:t> 85</a:t>
-            </a:r>
-            <a:r>
-              <a:rPr lang="fr-FR" sz="2400" dirty="0"/>
-              <a:t>% global (78% code métier)</a:t>
-            </a:r>
-          </a:p>
-          <a:p>
-            <a:pPr marL="457200" lvl="1" indent="0">
-              <a:buNone/>
-            </a:pPr>
-            <a:endParaRPr lang="fr-FR" sz="2000" dirty="0" smtClean="0"/>
+              <a:rPr lang="fr-FR" dirty="0" smtClean="0"/>
+              <a:t>Mauvais fichier</a:t>
+            </a:r>
+            <a:endParaRPr dirty="0"/>
           </a:p>
         </p:txBody>
       </p:sp>
     </p:spTree>
+    <p:extLst>
+      <p:ext uri="{BB962C8B-B14F-4D97-AF65-F5344CB8AC3E}">
+        <p14:creationId xmlns:p14="http://schemas.microsoft.com/office/powerpoint/2010/main" val="4248737819"/>
+      </p:ext>
+    </p:extLst>
   </p:cSld>
   <p:clrMapOvr>
     <a:masterClrMapping/>
@@ -3724,8 +3624,18 @@
           <a:lstStyle/>
           <a:p>
             <a:r>
-              <a:t>Performance</a:t>
-            </a:r>
+              <a:rPr lang="fr-FR" b="1" dirty="0"/>
+              <a:t>Documentation API (</a:t>
+            </a:r>
+            <a:r>
+              <a:rPr lang="fr-FR" b="1" dirty="0" err="1"/>
+              <a:t>Swagger</a:t>
+            </a:r>
+            <a:r>
+              <a:rPr lang="fr-FR" b="1" dirty="0"/>
+              <a:t>)</a:t>
+            </a:r>
+            <a:endParaRPr dirty="0"/>
           </a:p>
         </p:txBody>
       </p:sp>
@@ -3750,87 +3660,161 @@
               <a:buNone/>
             </a:pPr>
             <a:r>
-              <a:rPr lang="fr-FR" sz="2800" dirty="0"/>
-              <a:t>Outils de </a:t>
-            </a:r>
-            <a:r>
-              <a:rPr lang="fr-FR" sz="2800" dirty="0" smtClean="0"/>
-              <a:t>performance:</a:t>
-            </a:r>
-          </a:p>
-          <a:p>
+              <a:rPr lang="fr-FR" sz="2400" dirty="0" smtClean="0"/>
+              <a:t>Accessible </a:t>
+            </a:r>
+            <a:r>
+              <a:rPr lang="fr-FR" sz="2400" dirty="0"/>
+              <a:t>: </a:t>
+            </a:r>
+            <a:r>
+              <a:rPr lang="fr-FR" sz="2400" dirty="0">
+                <a:hlinkClick r:id="rId2"/>
+              </a:rPr>
+              <a:t>http://</a:t>
+            </a:r>
+            <a:r>
+              <a:rPr lang="fr-FR" sz="2400" dirty="0" smtClean="0">
+                <a:hlinkClick r:id="rId2"/>
+              </a:rPr>
+              <a:t>localhost:8080/swagger-ui/index.html</a:t>
+            </a:r>
+            <a:endParaRPr lang="fr-FR" sz="2400" dirty="0" smtClean="0"/>
+          </a:p>
+          <a:p>
+            <a:pPr marL="0" indent="0">
+              <a:buNone/>
+            </a:pPr>
+            <a:r>
+              <a:rPr lang="fr-FR" sz="2400" b="1" dirty="0" smtClean="0"/>
+              <a:t>Authentification</a:t>
+            </a:r>
+            <a:endParaRPr lang="fr-FR" sz="2400" dirty="0"/>
+          </a:p>
+          <a:p>
+            <a:r>
+              <a:rPr lang="fr-FR" sz="2400" dirty="0" smtClean="0"/>
+              <a:t>POST </a:t>
+            </a:r>
+            <a:r>
+              <a:rPr lang="fr-FR" sz="2400" dirty="0"/>
+              <a:t>/api/</a:t>
+            </a:r>
+            <a:r>
+              <a:rPr lang="fr-FR" sz="2400" dirty="0" err="1"/>
+              <a:t>register</a:t>
+            </a:r>
+            <a:endParaRPr lang="fr-FR" sz="2400" dirty="0"/>
+          </a:p>
+          <a:p>
+            <a:r>
+              <a:rPr lang="fr-FR" sz="2400" dirty="0" smtClean="0"/>
+              <a:t>POST </a:t>
+            </a:r>
+            <a:r>
+              <a:rPr lang="fr-FR" sz="2400" dirty="0"/>
+              <a:t>/api/login</a:t>
+            </a:r>
+          </a:p>
+          <a:p>
+            <a:pPr marL="0" indent="0">
+              <a:buNone/>
+            </a:pPr>
             <a:r>
               <a:rPr lang="fr-FR" sz="2400" b="1" dirty="0"/>
-              <a:t>k6 pour le </a:t>
-            </a:r>
-            <a:r>
-              <a:rPr lang="fr-FR" sz="2400" b="1" dirty="0" err="1"/>
-              <a:t>backend</a:t>
+              <a:t>Gestion des fichiers</a:t>
             </a:r>
             <a:endParaRPr lang="fr-FR" sz="2400" dirty="0"/>
           </a:p>
           <a:p>
-            <a:pPr lvl="1"/>
             <a:r>
               <a:rPr lang="fr-FR" sz="2400" dirty="0"/>
-              <a:t>Simulation de charge sur les </a:t>
+              <a:t>POST /api/files/</a:t>
             </a:r>
             <a:r>
               <a:rPr lang="fr-FR" sz="2400" dirty="0" err="1"/>
-              <a:t>endpoints</a:t>
+              <a:t>upload</a:t>
+            </a:r>
+            <a:endParaRPr lang="fr-FR" sz="2400" dirty="0"/>
+          </a:p>
+          <a:p>
+            <a:r>
+              <a:rPr lang="fr-FR" sz="2400" dirty="0" smtClean="0"/>
+              <a:t>GET </a:t>
             </a:r>
             <a:r>
               <a:rPr lang="fr-FR" sz="2400" dirty="0"/>
-              <a:t> principaux</a:t>
-            </a:r>
-          </a:p>
-          <a:p>
-            <a:pPr lvl="1"/>
+              <a:t>/api/files/</a:t>
+            </a:r>
+            <a:r>
+              <a:rPr lang="fr-FR" sz="2400" dirty="0" err="1"/>
+              <a:t>download</a:t>
+            </a:r>
             <a:r>
               <a:rPr lang="fr-FR" sz="2400" dirty="0"/>
-              <a:t>Tests réalisés avec 30 à 50 utilisateurs </a:t>
+              <a:t>/{</a:t>
+            </a:r>
+            <a:r>
+              <a:rPr lang="fr-FR" sz="2400" dirty="0" err="1" smtClean="0"/>
+              <a:t>token</a:t>
             </a:r>
             <a:r>
               <a:rPr lang="fr-FR" sz="2400" dirty="0" smtClean="0"/>
-              <a:t>simultanés</a:t>
-            </a:r>
-          </a:p>
-          <a:p>
-            <a:pPr marL="457200" lvl="1" indent="0">
+              <a:t>}</a:t>
+            </a:r>
+            <a:endParaRPr lang="fr-FR" sz="2400" dirty="0"/>
+          </a:p>
+          <a:p>
+            <a:r>
+              <a:rPr lang="fr-FR" sz="2400" dirty="0" smtClean="0"/>
+              <a:t>GET </a:t>
+            </a:r>
+            <a:r>
+              <a:rPr lang="fr-FR" sz="2400" dirty="0"/>
+              <a:t>/api/files/</a:t>
+            </a:r>
+            <a:r>
+              <a:rPr lang="fr-FR" sz="2400" dirty="0" err="1"/>
+              <a:t>my</a:t>
+            </a:r>
+            <a:r>
+              <a:rPr lang="fr-FR" sz="2400" dirty="0"/>
+              <a:t>-files</a:t>
+            </a:r>
+          </a:p>
+          <a:p>
+            <a:r>
+              <a:rPr lang="fr-FR" sz="2400" dirty="0" smtClean="0"/>
+              <a:t>DELETE </a:t>
+            </a:r>
+            <a:r>
+              <a:rPr lang="fr-FR" sz="2400" dirty="0"/>
+              <a:t>/api/files/{id}</a:t>
+            </a:r>
+          </a:p>
+          <a:p>
+            <a:r>
+              <a:rPr lang="fr-FR" sz="2400" dirty="0" smtClean="0"/>
+              <a:t>GET </a:t>
+            </a:r>
+            <a:r>
+              <a:rPr lang="fr-FR" sz="2400" dirty="0"/>
+              <a:t>/api/files/info/{</a:t>
+            </a:r>
+            <a:r>
+              <a:rPr lang="fr-FR" sz="2400" dirty="0" err="1"/>
+              <a:t>token</a:t>
+            </a:r>
+            <a:r>
+              <a:rPr lang="fr-FR" sz="2400" dirty="0"/>
+              <a:t>}</a:t>
+            </a:r>
+          </a:p>
+          <a:p>
+            <a:pPr marL="0" indent="0">
               <a:buNone/>
             </a:pPr>
-            <a:endParaRPr lang="fr-FR" sz="2400" dirty="0"/>
-          </a:p>
-          <a:p>
-            <a:r>
-              <a:rPr lang="fr-FR" sz="2400" b="1" dirty="0"/>
-              <a:t>Lighthouse pour le </a:t>
-            </a:r>
-            <a:r>
-              <a:rPr lang="fr-FR" sz="2400" b="1" dirty="0" err="1"/>
-              <a:t>frontend</a:t>
-            </a:r>
-            <a:endParaRPr lang="fr-FR" sz="2400" dirty="0"/>
-          </a:p>
-          <a:p>
-            <a:pPr lvl="1"/>
-            <a:r>
-              <a:rPr lang="fr-FR" sz="2400" dirty="0"/>
-              <a:t>Analyse des performances, de l’accessibilité et du SEO</a:t>
-            </a:r>
-          </a:p>
-          <a:p>
-            <a:pPr lvl="1"/>
-            <a:r>
-              <a:rPr lang="fr-FR" sz="2400" dirty="0"/>
-              <a:t>Évaluation du comportement du site côté navigateur</a:t>
-            </a:r>
-          </a:p>
-          <a:p>
-            <a:pPr marL="0" indent="0">
-              <a:buNone/>
-            </a:pPr>
-            <a:endParaRPr sz="2800" dirty="0"/>
+            <a:endParaRPr sz="2400" dirty="0"/>
           </a:p>
         </p:txBody>
       </p:sp>
@@ -3869,16 +3853,19 @@
             <p:ph type="title"/>
           </p:nvPr>
         </p:nvSpPr>
-        <p:spPr/>
-        <p:txBody>
-          <a:bodyPr/>
-          <a:lstStyle/>
-          <a:p>
-            <a:r>
-              <a:rPr lang="fr-FR" dirty="0"/>
-              <a:t>IA comme co-pilote</a:t>
-            </a:r>
-            <a:endParaRPr dirty="0"/>
+        <p:spPr>
+          <a:xfrm>
+            <a:off x="457200" y="260991"/>
+            <a:ext cx="8229600" cy="1143000"/>
+          </a:xfrm>
+        </p:spPr>
+        <p:txBody>
+          <a:bodyPr/>
+          <a:lstStyle/>
+          <a:p>
+            <a:r>
+              <a:t>Qualité &amp; tests</a:t>
+            </a:r>
           </a:p>
         </p:txBody>
       </p:sp>
@@ -3892,7 +3879,12 @@
             <p:ph idx="1"/>
           </p:nvPr>
         </p:nvSpPr>
-        <p:spPr/>
+        <p:spPr>
+          <a:xfrm>
+            <a:off x="457200" y="1801504"/>
+            <a:ext cx="8229600" cy="4324659"/>
+          </a:xfrm>
+        </p:spPr>
         <p:txBody>
           <a:bodyPr/>
           <a:lstStyle/>
@@ -3901,34 +3893,116 @@
               <a:buNone/>
             </a:pPr>
             <a:r>
-              <a:rPr lang="fr-FR" b="1" dirty="0"/>
-              <a:t>L’IA a été utilisée comme outil d’assistance pour :</a:t>
-            </a:r>
-            <a:endParaRPr lang="fr-FR" dirty="0"/>
-          </a:p>
-          <a:p>
+              <a:rPr lang="fr-FR" dirty="0" smtClean="0"/>
+              <a:t>Réalisation 3 type de tests:</a:t>
+            </a:r>
+          </a:p>
+          <a:p>
+            <a:r>
+              <a:rPr lang="fr-FR" sz="2800" dirty="0" smtClean="0"/>
+              <a:t>Test unitaire </a:t>
+            </a:r>
             <a:r>
               <a:rPr lang="fr-FR" sz="2800" dirty="0"/>
-              <a:t>Clarifier certains concepts techniques.</a:t>
-            </a:r>
-          </a:p>
-          <a:p>
+              <a:t>vérification des composants </a:t>
+            </a:r>
+            <a:endParaRPr lang="fr-FR" sz="2800" dirty="0" smtClean="0"/>
+          </a:p>
+          <a:p>
+            <a:r>
+              <a:rPr lang="fr-FR" sz="2800" dirty="0" smtClean="0"/>
+              <a:t>Test </a:t>
+            </a:r>
+            <a:r>
+              <a:rPr lang="fr-FR" sz="2800" dirty="0" err="1" smtClean="0"/>
+              <a:t>integration</a:t>
+            </a:r>
+            <a:r>
+              <a:rPr lang="fr-FR" sz="2800" dirty="0" smtClean="0"/>
+              <a:t> </a:t>
+            </a:r>
             <a:r>
               <a:rPr lang="fr-FR" sz="2800" dirty="0"/>
-              <a:t>Structurer l’architecture et la documentation.</a:t>
-            </a:r>
-          </a:p>
-          <a:p>
+              <a:t>validation des </a:t>
+            </a:r>
+            <a:r>
+              <a:rPr lang="fr-FR" sz="2800" dirty="0" err="1"/>
+              <a:t>endpoints</a:t>
+            </a:r>
             <a:r>
               <a:rPr lang="fr-FR" sz="2800" dirty="0"/>
-              <a:t>Générer et adapter les scripts de déploiement.</a:t>
-            </a:r>
-          </a:p>
-          <a:p>
+              <a:t> REST </a:t>
+            </a:r>
+            <a:endParaRPr sz="2800" dirty="0"/>
+          </a:p>
+          <a:p>
+            <a:r>
+              <a:rPr lang="fr-FR" sz="2800" dirty="0" smtClean="0"/>
+              <a:t>Test E3E pour simulé le </a:t>
+            </a:r>
             <a:r>
               <a:rPr lang="fr-FR" sz="2800" dirty="0"/>
-              <a:t>Analyser les erreurs de code et faciliter le débogage.</a:t>
-            </a:r>
+              <a:t>parcours utilisateur </a:t>
+            </a:r>
+            <a:r>
+              <a:rPr lang="fr-FR" sz="2800" dirty="0" err="1" smtClean="0"/>
+              <a:t>complete</a:t>
+            </a:r>
+            <a:endParaRPr lang="fr-FR" sz="2800" dirty="0" smtClean="0"/>
+          </a:p>
+          <a:p>
+            <a:r>
+              <a:rPr lang="fr-FR" sz="2800" dirty="0" smtClean="0"/>
+              <a:t>Couverture globale </a:t>
+            </a:r>
+            <a:r>
+              <a:rPr sz="2800" dirty="0" smtClean="0"/>
+              <a:t>backend </a:t>
+            </a:r>
+            <a:r>
+              <a:rPr sz="2800" dirty="0"/>
+              <a:t>&amp; </a:t>
+            </a:r>
+            <a:r>
+              <a:rPr sz="2800" dirty="0" smtClean="0"/>
+              <a:t>frontend</a:t>
+            </a:r>
+            <a:r>
+              <a:rPr lang="fr-FR" sz="2800" dirty="0"/>
+              <a:t>:</a:t>
+            </a:r>
+            <a:endParaRPr lang="fr-FR" sz="3600" dirty="0" smtClean="0"/>
+          </a:p>
+          <a:p>
+            <a:pPr lvl="1"/>
+            <a:r>
+              <a:rPr lang="fr-FR" sz="2400" dirty="0" err="1" smtClean="0"/>
+              <a:t>Frontend</a:t>
+            </a:r>
+            <a:r>
+              <a:rPr lang="fr-FR" sz="2400" dirty="0" smtClean="0"/>
+              <a:t> : 75%</a:t>
+            </a:r>
+          </a:p>
+          <a:p>
+            <a:pPr lvl="1"/>
+            <a:r>
+              <a:rPr lang="fr-FR" sz="2400" dirty="0" err="1" smtClean="0"/>
+              <a:t>Backend</a:t>
+            </a:r>
+            <a:r>
+              <a:rPr lang="fr-FR" sz="2400" dirty="0" smtClean="0"/>
+              <a:t> </a:t>
+            </a:r>
+            <a:r>
+              <a:rPr lang="fr-FR" sz="2400" dirty="0"/>
+              <a:t>: </a:t>
+            </a:r>
+            <a:r>
+              <a:rPr lang="fr-FR" sz="2400" dirty="0" smtClean="0"/>
+              <a:t> 85%</a:t>
+            </a:r>
+            <a:endParaRPr lang="fr-FR" sz="2000" dirty="0" smtClean="0"/>
           </a:p>
         </p:txBody>
       </p:sp>
@@ -3967,6 +4041,273 @@
             <p:ph type="title"/>
           </p:nvPr>
         </p:nvSpPr>
+        <p:spPr/>
+        <p:txBody>
+          <a:bodyPr/>
+          <a:lstStyle/>
+          <a:p>
+            <a:r>
+              <a:t>Performance</a:t>
+            </a:r>
+          </a:p>
+        </p:txBody>
+      </p:sp>
+      <p:sp>
+        <p:nvSpPr>
+          <p:cNvPr id="3" name="Content Placeholder 2"/>
+          <p:cNvSpPr>
+            <a:spLocks noGrp="1"/>
+          </p:cNvSpPr>
+          <p:nvPr>
+            <p:ph idx="1"/>
+          </p:nvPr>
+        </p:nvSpPr>
+        <p:spPr/>
+        <p:txBody>
+          <a:bodyPr>
+            <a:normAutofit/>
+          </a:bodyPr>
+          <a:lstStyle/>
+          <a:p>
+            <a:pPr marL="0" indent="0">
+              <a:buNone/>
+            </a:pPr>
+            <a:r>
+              <a:rPr lang="fr-FR" sz="2800" dirty="0"/>
+              <a:t>Outils de </a:t>
+            </a:r>
+            <a:r>
+              <a:rPr lang="fr-FR" sz="2800" dirty="0" smtClean="0"/>
+              <a:t>performance:</a:t>
+            </a:r>
+          </a:p>
+          <a:p>
+            <a:r>
+              <a:rPr lang="fr-FR" sz="2400" b="1" dirty="0"/>
+              <a:t>k6 pour le </a:t>
+            </a:r>
+            <a:r>
+              <a:rPr lang="fr-FR" sz="2400" b="1" dirty="0" err="1"/>
+              <a:t>backend</a:t>
+            </a:r>
+            <a:endParaRPr lang="fr-FR" sz="2400" dirty="0"/>
+          </a:p>
+          <a:p>
+            <a:pPr lvl="1"/>
+            <a:r>
+              <a:rPr lang="fr-FR" sz="2400" dirty="0"/>
+              <a:t>Simulation de charge sur les </a:t>
+            </a:r>
+            <a:r>
+              <a:rPr lang="fr-FR" sz="2400" dirty="0" err="1"/>
+              <a:t>endpoints</a:t>
+            </a:r>
+            <a:r>
+              <a:rPr lang="fr-FR" sz="2400" dirty="0"/>
+              <a:t> principaux</a:t>
+            </a:r>
+          </a:p>
+          <a:p>
+            <a:pPr lvl="1"/>
+            <a:r>
+              <a:rPr lang="fr-FR" sz="2400" dirty="0"/>
+              <a:t>Tests réalisés avec 30 à 50 utilisateurs </a:t>
+            </a:r>
+            <a:r>
+              <a:rPr lang="fr-FR" sz="2400" dirty="0" smtClean="0"/>
+              <a:t>simultanés</a:t>
+            </a:r>
+          </a:p>
+          <a:p>
+            <a:pPr marL="457200" lvl="1" indent="0">
+              <a:buNone/>
+            </a:pPr>
+            <a:endParaRPr lang="fr-FR" sz="2400" dirty="0"/>
+          </a:p>
+          <a:p>
+            <a:r>
+              <a:rPr lang="fr-FR" sz="2400" b="1" dirty="0"/>
+              <a:t>Lighthouse pour le </a:t>
+            </a:r>
+            <a:r>
+              <a:rPr lang="fr-FR" sz="2400" b="1" dirty="0" err="1"/>
+              <a:t>frontend</a:t>
+            </a:r>
+            <a:endParaRPr lang="fr-FR" sz="2400" dirty="0"/>
+          </a:p>
+          <a:p>
+            <a:pPr lvl="1"/>
+            <a:r>
+              <a:rPr lang="fr-FR" sz="2400" dirty="0"/>
+              <a:t>Analyse des performances, de l’accessibilité et du SEO</a:t>
+            </a:r>
+          </a:p>
+          <a:p>
+            <a:pPr lvl="1"/>
+            <a:r>
+              <a:rPr lang="fr-FR" sz="2400" dirty="0"/>
+              <a:t>Évaluation du comportement du site côté navigateur</a:t>
+            </a:r>
+          </a:p>
+          <a:p>
+            <a:pPr marL="0" indent="0">
+              <a:buNone/>
+            </a:pPr>
+            <a:endParaRPr sz="2800" dirty="0"/>
+          </a:p>
+        </p:txBody>
+      </p:sp>
+    </p:spTree>
+  </p:cSld>
+  <p:clrMapOvr>
+    <a:masterClrMapping/>
+  </p:clrMapOvr>
+</p:sld>
+</file>
+
+<file path=ppt/slides/slide15.xml><?xml version="1.0" encoding="utf-8"?>
+<p:sld xmlns:a="http://schemas.openxmlformats.org/drawingml/2006/main" xmlns:r="http://schemas.openxmlformats.org/officeDocument/2006/relationships" xmlns:p="http://schemas.openxmlformats.org/presentationml/2006/main">
+  <p:cSld>
+    <p:spTree>
+      <p:nvGrpSpPr>
+        <p:cNvPr id="1" name=""/>
+        <p:cNvGrpSpPr/>
+        <p:nvPr/>
+      </p:nvGrpSpPr>
+      <p:grpSpPr>
+        <a:xfrm>
+          <a:off x="0" y="0"/>
+          <a:ext cx="0" cy="0"/>
+          <a:chOff x="0" y="0"/>
+          <a:chExt cx="0" cy="0"/>
+        </a:xfrm>
+      </p:grpSpPr>
+      <p:sp>
+        <p:nvSpPr>
+          <p:cNvPr id="2" name="Title 1"/>
+          <p:cNvSpPr>
+            <a:spLocks noGrp="1"/>
+          </p:cNvSpPr>
+          <p:nvPr>
+            <p:ph type="title"/>
+          </p:nvPr>
+        </p:nvSpPr>
+        <p:spPr/>
+        <p:txBody>
+          <a:bodyPr/>
+          <a:lstStyle/>
+          <a:p>
+            <a:r>
+              <a:rPr lang="fr-FR" dirty="0"/>
+              <a:t>IA comme co-pilote</a:t>
+            </a:r>
+            <a:endParaRPr dirty="0"/>
+          </a:p>
+        </p:txBody>
+      </p:sp>
+      <p:sp>
+        <p:nvSpPr>
+          <p:cNvPr id="3" name="Content Placeholder 2"/>
+          <p:cNvSpPr>
+            <a:spLocks noGrp="1"/>
+          </p:cNvSpPr>
+          <p:nvPr>
+            <p:ph idx="1"/>
+          </p:nvPr>
+        </p:nvSpPr>
+        <p:spPr/>
+        <p:txBody>
+          <a:bodyPr/>
+          <a:lstStyle/>
+          <a:p>
+            <a:pPr marL="0" indent="0">
+              <a:buNone/>
+            </a:pPr>
+            <a:r>
+              <a:rPr lang="fr-FR" b="1" dirty="0"/>
+              <a:t>L’IA a été utilisée comme outil d’assistance pour :</a:t>
+            </a:r>
+            <a:endParaRPr lang="fr-FR" dirty="0"/>
+          </a:p>
+          <a:p>
+            <a:r>
+              <a:rPr lang="fr-FR" sz="2800" dirty="0"/>
+              <a:t>Clarifier certains concepts techniques.</a:t>
+            </a:r>
+          </a:p>
+          <a:p>
+            <a:r>
+              <a:rPr lang="fr-FR" sz="2800" dirty="0"/>
+              <a:t>Structurer l’architecture et la documentation.</a:t>
+            </a:r>
+          </a:p>
+          <a:p>
+            <a:r>
+              <a:rPr lang="fr-FR" sz="2800" dirty="0" smtClean="0"/>
+              <a:t>Générer et adapter les scripts de déploiement.</a:t>
+            </a:r>
+          </a:p>
+          <a:p>
+            <a:r>
+              <a:rPr lang="fr-FR" sz="2800" dirty="0" smtClean="0"/>
+              <a:t>Analyser </a:t>
+            </a:r>
+            <a:r>
+              <a:rPr lang="fr-FR" sz="2800" dirty="0"/>
+              <a:t>les erreurs de code et faciliter le débogage</a:t>
+            </a:r>
+            <a:r>
+              <a:rPr lang="fr-FR" sz="2800" dirty="0" smtClean="0"/>
+              <a:t>.</a:t>
+            </a:r>
+            <a:endParaRPr lang="fr-FR" sz="2800" dirty="0"/>
+          </a:p>
+          <a:p>
+            <a:r>
+              <a:rPr lang="fr-FR" sz="2800" dirty="0"/>
+              <a:t>Création requête SQL pour initialisation de la base de donne</a:t>
+            </a:r>
+          </a:p>
+          <a:p>
+            <a:endParaRPr lang="fr-FR" sz="2800" u="sng" dirty="0"/>
+          </a:p>
+        </p:txBody>
+      </p:sp>
+    </p:spTree>
+  </p:cSld>
+  <p:clrMapOvr>
+    <a:masterClrMapping/>
+  </p:clrMapOvr>
+</p:sld>
+</file>
+
+<file path=ppt/slides/slide16.xml><?xml version="1.0" encoding="utf-8"?>
+<p:sld xmlns:a="http://schemas.openxmlformats.org/drawingml/2006/main" xmlns:r="http://schemas.openxmlformats.org/officeDocument/2006/relationships" xmlns:p="http://schemas.openxmlformats.org/presentationml/2006/main">
+  <p:cSld>
+    <p:spTree>
+      <p:nvGrpSpPr>
+        <p:cNvPr id="1" name=""/>
+        <p:cNvGrpSpPr/>
+        <p:nvPr/>
+      </p:nvGrpSpPr>
+      <p:grpSpPr>
+        <a:xfrm>
+          <a:off x="0" y="0"/>
+          <a:ext cx="0" cy="0"/>
+          <a:chOff x="0" y="0"/>
+          <a:chExt cx="0" cy="0"/>
+        </a:xfrm>
+      </p:grpSpPr>
+      <p:sp>
+        <p:nvSpPr>
+          <p:cNvPr id="2" name="Title 1"/>
+          <p:cNvSpPr>
+            <a:spLocks noGrp="1"/>
+          </p:cNvSpPr>
+          <p:nvPr>
+            <p:ph type="title"/>
+          </p:nvPr>
+        </p:nvSpPr>
         <p:spPr>
           <a:xfrm>
             <a:off x="293427" y="2731235"/>
@@ -4025,8 +4366,10 @@
           <a:lstStyle/>
           <a:p>
             <a:r>
-              <a:t>Contexte métier</a:t>
-            </a:r>
+              <a:rPr lang="fr-FR" dirty="0"/>
+              <a:t>Contexte fonctionnel</a:t>
+            </a:r>
+            <a:endParaRPr dirty="0"/>
           </a:p>
         </p:txBody>
       </p:sp>
@@ -4040,67 +4383,40 @@
             <p:ph idx="1"/>
           </p:nvPr>
         </p:nvSpPr>
-        <p:spPr/>
-        <p:txBody>
-          <a:bodyPr/>
-          <a:lstStyle/>
-          <a:p>
-            <a:r>
-              <a:rPr dirty="0" err="1"/>
-              <a:t>Partage</a:t>
-            </a:r>
-            <a:r>
-              <a:rPr dirty="0"/>
-              <a:t> de </a:t>
-            </a:r>
-            <a:r>
-              <a:rPr dirty="0" err="1"/>
-              <a:t>fichiers</a:t>
-            </a:r>
-            <a:r>
-              <a:rPr dirty="0"/>
-              <a:t> </a:t>
-            </a:r>
-            <a:r>
-              <a:rPr dirty="0" err="1"/>
-              <a:t>rapide</a:t>
-            </a:r>
-            <a:r>
-              <a:rPr dirty="0"/>
-              <a:t> et </a:t>
-            </a:r>
-            <a:r>
-              <a:rPr dirty="0" err="1"/>
-              <a:t>sécurisé</a:t>
-            </a:r>
-            <a:endParaRPr dirty="0"/>
-          </a:p>
-          <a:p>
-            <a:r>
-              <a:rPr dirty="0" err="1"/>
-              <a:t>Objectif</a:t>
-            </a:r>
-            <a:r>
-              <a:rPr dirty="0"/>
-              <a:t> : </a:t>
-            </a:r>
+        <p:spPr>
+          <a:xfrm>
+            <a:off x="457200" y="1600200"/>
+            <a:ext cx="8428008" cy="4525963"/>
+          </a:xfrm>
+        </p:spPr>
+        <p:txBody>
+          <a:bodyPr/>
+          <a:lstStyle/>
+          <a:p>
             <a:r>
               <a:rPr lang="fr-FR" dirty="0"/>
-              <a:t>Permettre aux utilisateurs de </a:t>
-            </a:r>
-            <a:r>
-              <a:rPr lang="fr-FR" dirty="0" err="1" smtClean="0"/>
-              <a:t>téléverser</a:t>
+              <a:t>Besoin : partager des fichiers rapidement et en sécurité</a:t>
+            </a:r>
+          </a:p>
+          <a:p>
+            <a:r>
+              <a:rPr lang="fr-FR" dirty="0"/>
+              <a:t>Problème </a:t>
             </a:r>
             <a:r>
               <a:rPr lang="fr-FR" dirty="0" smtClean="0"/>
-              <a:t> </a:t>
+              <a:t>: Obligation de être inscrit pour pouvoir télécharger les fichiers</a:t>
+            </a:r>
+          </a:p>
+          <a:p>
+            <a:r>
+              <a:rPr lang="fr-FR" dirty="0" smtClean="0"/>
+              <a:t>Solution </a:t>
             </a:r>
             <a:r>
               <a:rPr lang="fr-FR" dirty="0"/>
-              <a:t>des fichiers et de partager un lien unique avec d’autres personnes afin de les télécharger, sans obligation de connexion</a:t>
-            </a:r>
-            <a:endParaRPr dirty="0"/>
+              <a:t>: lien temporaire sécurisé sans compte pour le destinataire</a:t>
+            </a:r>
           </a:p>
         </p:txBody>
       </p:sp>
@@ -4152,7 +4468,7 @@
           <a:lstStyle/>
           <a:p>
             <a:r>
-              <a:t>Fonctionnalités MVP</a:t>
+              <a:t>Objectifs</a:t>
             </a:r>
           </a:p>
         </p:txBody>
@@ -4174,95 +4490,80 @@
           <a:p>
             <a:r>
               <a:rPr dirty="0"/>
-              <a:t>- </a:t>
-            </a:r>
-            <a:r>
-              <a:rPr lang="fr-FR" dirty="0" err="1"/>
-              <a:t>Auth</a:t>
-            </a:r>
-            <a:r>
-              <a:rPr lang="fr-FR" dirty="0"/>
-              <a:t>: </a:t>
-            </a:r>
-            <a:r>
-              <a:rPr lang="fr-FR" dirty="0" err="1"/>
-              <a:t>Register</a:t>
-            </a:r>
-            <a:r>
-              <a:rPr lang="fr-FR" dirty="0"/>
-              <a:t>/Login (JWT)</a:t>
-            </a:r>
-            <a:endParaRPr lang="fr-FR" dirty="0" smtClean="0"/>
-          </a:p>
-          <a:p>
-            <a:r>
-              <a:rPr lang="fr-FR" dirty="0" smtClean="0"/>
-              <a:t>-</a:t>
-            </a:r>
-            <a:r>
-              <a:rPr dirty="0" smtClean="0"/>
-              <a:t>Upload </a:t>
+              <a:t>Upload simple</a:t>
+            </a:r>
+          </a:p>
+          <a:p>
+            <a:r>
+              <a:rPr dirty="0"/>
+              <a:t>Lien de </a:t>
             </a:r>
             <a:r>
               <a:rPr dirty="0" err="1"/>
-              <a:t>fichiers</a:t>
+              <a:t>téléchargement</a:t>
+            </a:r>
+            <a:r>
+              <a:rPr dirty="0"/>
+              <a:t> unique</a:t>
+            </a:r>
+          </a:p>
+          <a:p>
+            <a:r>
+              <a:rPr dirty="0" err="1"/>
+              <a:t>Sécurité</a:t>
+            </a:r>
+            <a:r>
+              <a:rPr dirty="0"/>
+              <a:t> des </a:t>
+            </a:r>
+            <a:r>
+              <a:rPr dirty="0" err="1"/>
+              <a:t>accès</a:t>
             </a:r>
             <a:endParaRPr dirty="0"/>
           </a:p>
           <a:p>
             <a:r>
               <a:rPr dirty="0"/>
-              <a:t>- Download via lien</a:t>
-            </a:r>
-          </a:p>
-          <a:p>
-            <a:r>
-              <a:rPr dirty="0" smtClean="0"/>
-              <a:t>- </a:t>
-            </a:r>
-            <a:r>
-              <a:rPr lang="fr-FR" dirty="0"/>
-              <a:t>Historique des fichiers </a:t>
-            </a:r>
-            <a:r>
-              <a:rPr lang="fr-FR" dirty="0" err="1"/>
-              <a:t>téléversés</a:t>
-            </a:r>
-            <a:endParaRPr lang="fr-FR" dirty="0"/>
-          </a:p>
-          <a:p>
-            <a:r>
-              <a:rPr dirty="0" smtClean="0"/>
-              <a:t>- </a:t>
+              <a:t>Expiration </a:t>
+            </a:r>
+            <a:r>
+              <a:rPr dirty="0" err="1"/>
+              <a:t>automatique</a:t>
+            </a:r>
+            <a:endParaRPr dirty="0"/>
+          </a:p>
+          <a:p>
+            <a:r>
+              <a:rPr dirty="0" err="1"/>
+              <a:t>Expérience</a:t>
             </a:r>
             <a:r>
               <a:rPr dirty="0"/>
-              <a:t>Suppression </a:t>
+              <a:t> </a:t>
             </a:r>
             <a:r>
               <a:rPr dirty="0" err="1"/>
-              <a:t>fichiers</a:t>
+              <a:t>utilisateur</a:t>
+            </a:r>
+            <a:r>
+              <a:rPr dirty="0"/>
+              <a:t> </a:t>
+            </a:r>
+            <a:r>
+              <a:rPr dirty="0" err="1"/>
+              <a:t>fluide</a:t>
             </a:r>
             <a:endParaRPr dirty="0"/>
           </a:p>
-          <a:p>
-            <a:r>
-              <a:rPr dirty="0"/>
-              <a:t>- Expiration (1–7 </a:t>
-            </a:r>
-            <a:r>
-              <a:rPr dirty="0" err="1"/>
-              <a:t>jours</a:t>
-            </a:r>
-            <a:r>
-              <a:rPr dirty="0" smtClean="0"/>
-              <a:t>)</a:t>
-            </a:r>
-            <a:endParaRPr dirty="0"/>
-          </a:p>
         </p:txBody>
       </p:sp>
     </p:spTree>
+    <p:extLst>
+      <p:ext uri="{BB962C8B-B14F-4D97-AF65-F5344CB8AC3E}">
+        <p14:creationId xmlns:p14="http://schemas.microsoft.com/office/powerpoint/2010/main" val="2275051409"/>
+      </p:ext>
+    </p:extLst>
   </p:cSld>
   <p:clrMapOvr>
     <a:masterClrMapping/>
@@ -4367,33 +4668,113 @@
             <p:ph type="title"/>
           </p:nvPr>
         </p:nvSpPr>
-        <p:spPr>
-          <a:xfrm>
-            <a:off x="457200" y="2990543"/>
-            <a:ext cx="8229600" cy="1143000"/>
-          </a:xfrm>
-        </p:spPr>
-        <p:txBody>
-          <a:bodyPr/>
-          <a:lstStyle/>
-          <a:p>
+        <p:spPr/>
+        <p:txBody>
+          <a:bodyPr/>
+          <a:lstStyle/>
+          <a:p>
+            <a:r>
+              <a:t>Choix technologiques</a:t>
+            </a:r>
+          </a:p>
+        </p:txBody>
+      </p:sp>
+      <p:sp>
+        <p:nvSpPr>
+          <p:cNvPr id="3" name="Content Placeholder 2"/>
+          <p:cNvSpPr>
+            <a:spLocks noGrp="1"/>
+          </p:cNvSpPr>
+          <p:nvPr>
+            <p:ph idx="1"/>
+          </p:nvPr>
+        </p:nvSpPr>
+        <p:spPr/>
+        <p:txBody>
+          <a:bodyPr/>
+          <a:lstStyle/>
+          <a:p>
+            <a:r>
+              <a:rPr dirty="0"/>
+              <a:t>Frontend : Angular (structure + </a:t>
+            </a:r>
             <a:r>
               <a:rPr dirty="0" err="1"/>
-              <a:t>Choix</a:t>
+              <a:t>TypeScript</a:t>
             </a:r>
             <a:r>
               <a:rPr dirty="0"/>
-              <a:t> </a:t>
+              <a:t>)</a:t>
+            </a:r>
+          </a:p>
+          <a:p>
+            <a:r>
+              <a:rPr dirty="0"/>
+              <a:t>Backend : Spring Boot (API REST </a:t>
             </a:r>
             <a:r>
               <a:rPr dirty="0" err="1"/>
-              <a:t>technologiques</a:t>
-            </a:r>
-            <a:endParaRPr dirty="0"/>
+              <a:t>sécurisée</a:t>
+            </a:r>
+            <a:r>
+              <a:rPr dirty="0"/>
+              <a:t>)</a:t>
+            </a:r>
+          </a:p>
+          <a:p>
+            <a:r>
+              <a:rPr dirty="0"/>
+              <a:t>Base de </a:t>
+            </a:r>
+            <a:r>
+              <a:rPr dirty="0" err="1"/>
+              <a:t>données</a:t>
+            </a:r>
+            <a:r>
+              <a:rPr dirty="0"/>
+              <a:t> : PostgreSQL (</a:t>
+            </a:r>
+            <a:r>
+              <a:rPr dirty="0" err="1"/>
+              <a:t>fiabilité</a:t>
+            </a:r>
+            <a:r>
+              <a:rPr dirty="0"/>
+              <a:t>)</a:t>
+            </a:r>
+          </a:p>
+          <a:p>
+            <a:r>
+              <a:rPr dirty="0" err="1"/>
+              <a:t>Authentification</a:t>
+            </a:r>
+            <a:r>
+              <a:rPr dirty="0"/>
+              <a:t> : JWT (stateless)</a:t>
+            </a:r>
+          </a:p>
+          <a:p>
+            <a:r>
+              <a:rPr dirty="0"/>
+              <a:t>Tests : JUnit, </a:t>
+            </a:r>
+            <a:r>
+              <a:rPr dirty="0" err="1"/>
+              <a:t>Mockito</a:t>
+            </a:r>
+            <a:r>
+              <a:rPr dirty="0"/>
+              <a:t>, Jasmine</a:t>
+            </a:r>
           </a:p>
         </p:txBody>
       </p:sp>
     </p:spTree>
+    <p:extLst>
+      <p:ext uri="{BB962C8B-B14F-4D97-AF65-F5344CB8AC3E}">
+        <p14:creationId xmlns:p14="http://schemas.microsoft.com/office/powerpoint/2010/main" val="427845960"/>
+      </p:ext>
+    </p:extLst>
   </p:cSld>
   <p:clrMapOvr>
     <a:masterClrMapping/>
@@ -4420,7 +4801,7 @@
       </p:grpSpPr>
       <p:sp>
         <p:nvSpPr>
-          <p:cNvPr id="2" name="Titolo 1"/>
+          <p:cNvPr id="2" name="Title 1"/>
           <p:cNvSpPr>
             <a:spLocks noGrp="1"/>
           </p:cNvSpPr>
@@ -4434,479 +4815,128 @@
           <a:lstStyle/>
           <a:p>
             <a:r>
-              <a:rPr lang="fr-FR" b="1" dirty="0" err="1"/>
-              <a:t>Stack</a:t>
-            </a:r>
-            <a:r>
-              <a:rPr lang="fr-FR" b="1" dirty="0"/>
+              <a:t>Justification des choix</a:t>
+            </a:r>
+          </a:p>
+        </p:txBody>
+      </p:sp>
+      <p:sp>
+        <p:nvSpPr>
+          <p:cNvPr id="3" name="Content Placeholder 2"/>
+          <p:cNvSpPr>
+            <a:spLocks noGrp="1"/>
+          </p:cNvSpPr>
+          <p:nvPr>
+            <p:ph idx="1"/>
+          </p:nvPr>
+        </p:nvSpPr>
+        <p:spPr>
+          <a:xfrm>
+            <a:off x="155275" y="1600200"/>
+            <a:ext cx="8798943" cy="4525963"/>
+          </a:xfrm>
+        </p:spPr>
+        <p:txBody>
+          <a:bodyPr/>
+          <a:lstStyle/>
+          <a:p>
+            <a:r>
+              <a:rPr dirty="0"/>
+              <a:t>Angular : architecture </a:t>
+            </a:r>
+            <a:r>
+              <a:rPr dirty="0" err="1"/>
+              <a:t>claire</a:t>
+            </a:r>
+            <a:r>
+              <a:rPr dirty="0"/>
+              <a:t> et </a:t>
+            </a:r>
+            <a:r>
+              <a:rPr dirty="0" err="1"/>
+              <a:t>maintenable</a:t>
+            </a:r>
+            <a:endParaRPr dirty="0"/>
+          </a:p>
+          <a:p>
+            <a:r>
+              <a:rPr dirty="0"/>
+              <a:t>Spring Boot : </a:t>
+            </a:r>
+            <a:r>
+              <a:rPr dirty="0" err="1"/>
+              <a:t>sécurité</a:t>
+            </a:r>
+            <a:r>
+              <a:rPr dirty="0"/>
               <a:t> </a:t>
             </a:r>
             <a:r>
-              <a:rPr lang="fr-FR" b="1" dirty="0" err="1"/>
-              <a:t>Backend</a:t>
-            </a:r>
-            <a:endParaRPr lang="fr-FR" dirty="0"/>
-          </a:p>
-        </p:txBody>
-      </p:sp>
-      <p:graphicFrame>
-        <p:nvGraphicFramePr>
-          <p:cNvPr id="8" name="Tabella 7"/>
-          <p:cNvGraphicFramePr>
-            <a:graphicFrameLocks noGrp="1"/>
-          </p:cNvGraphicFramePr>
-          <p:nvPr>
-            <p:extLst>
-              <p:ext uri="{D42A27DB-BD31-4B8C-83A1-F6EECF244321}">
-                <p14:modId xmlns:p14="http://schemas.microsoft.com/office/powerpoint/2010/main" val="2295073857"/>
-              </p:ext>
-            </p:extLst>
-          </p:nvPr>
-        </p:nvGraphicFramePr>
-        <p:xfrm>
-          <a:off x="457200" y="1397000"/>
-          <a:ext cx="8229600" cy="4404360"/>
-        </p:xfrm>
-        <a:graphic>
-          <a:graphicData uri="http://schemas.openxmlformats.org/drawingml/2006/table">
-            <a:tbl>
-              <a:tblPr firstRow="1" bandRow="1">
-                <a:tableStyleId>{5C22544A-7EE6-4342-B048-85BDC9FD1C3A}</a:tableStyleId>
-              </a:tblPr>
-              <a:tblGrid>
-                <a:gridCol w="2743200"/>
-                <a:gridCol w="2743200"/>
-                <a:gridCol w="2743200"/>
-              </a:tblGrid>
-              <a:tr h="370840">
-                <a:tc>
-                  <a:txBody>
-                    <a:bodyPr/>
-                    <a:lstStyle/>
-                    <a:p>
-                      <a:r>
-                        <a:rPr lang="fr-FR" dirty="0" smtClean="0"/>
-                        <a:t>Composant </a:t>
-                      </a:r>
-                      <a:endParaRPr lang="fr-FR" dirty="0"/>
-                    </a:p>
-                  </a:txBody>
-                  <a:tcPr/>
-                </a:tc>
-                <a:tc>
-                  <a:txBody>
-                    <a:bodyPr/>
-                    <a:lstStyle/>
-                    <a:p>
-                      <a:r>
-                        <a:rPr lang="fr-FR" dirty="0" smtClean="0"/>
-                        <a:t>Technologie </a:t>
-                      </a:r>
-                      <a:endParaRPr lang="fr-FR" dirty="0"/>
-                    </a:p>
-                  </a:txBody>
-                  <a:tcPr/>
-                </a:tc>
-                <a:tc>
-                  <a:txBody>
-                    <a:bodyPr/>
-                    <a:lstStyle/>
-                    <a:p>
-                      <a:r>
-                        <a:rPr lang="fr-FR" dirty="0" smtClean="0"/>
-                        <a:t>Justification</a:t>
-                      </a:r>
-                      <a:endParaRPr lang="fr-FR" dirty="0"/>
-                    </a:p>
-                  </a:txBody>
-                  <a:tcPr/>
-                </a:tc>
-              </a:tr>
-              <a:tr h="370840">
-                <a:tc>
-                  <a:txBody>
-                    <a:bodyPr/>
-                    <a:lstStyle/>
-                    <a:p>
-                      <a:r>
-                        <a:rPr kumimoji="0" lang="fr-FR" sz="1800" b="0" i="0" u="none" strike="noStrike" kern="1200" cap="none" spc="0" normalizeH="0" baseline="0" noProof="0" dirty="0" smtClean="0">
-                          <a:ln>
-                            <a:noFill/>
-                          </a:ln>
-                          <a:solidFill>
-                            <a:prstClr val="black"/>
-                          </a:solidFill>
-                          <a:effectLst/>
-                          <a:uLnTx/>
-                          <a:uFillTx/>
-                          <a:latin typeface="+mn-lt"/>
-                          <a:ea typeface="+mn-ea"/>
-                          <a:cs typeface="+mn-cs"/>
-                        </a:rPr>
-                        <a:t>Langage</a:t>
-                      </a:r>
-                      <a:endParaRPr lang="fr-FR" dirty="0"/>
-                    </a:p>
-                  </a:txBody>
-                  <a:tcPr/>
-                </a:tc>
-                <a:tc>
-                  <a:txBody>
-                    <a:bodyPr/>
-                    <a:lstStyle/>
-                    <a:p>
-                      <a:r>
-                        <a:rPr lang="fr-FR" dirty="0" smtClean="0"/>
-                        <a:t>Java 17 </a:t>
-                      </a:r>
-                      <a:endParaRPr lang="fr-FR" dirty="0"/>
-                    </a:p>
-                  </a:txBody>
-                  <a:tcPr/>
-                </a:tc>
-                <a:tc>
-                  <a:txBody>
-                    <a:bodyPr/>
-                    <a:lstStyle/>
-                    <a:p>
-                      <a:r>
-                        <a:rPr lang="fr-FR" dirty="0" smtClean="0"/>
-                        <a:t>Robustesse/</a:t>
-                      </a:r>
-                      <a:r>
-                        <a:rPr lang="fr-FR" dirty="0" err="1" smtClean="0"/>
-                        <a:t>scalabilité</a:t>
-                      </a:r>
-                      <a:endParaRPr lang="fr-FR" dirty="0"/>
-                    </a:p>
-                  </a:txBody>
-                  <a:tcPr/>
-                </a:tc>
-              </a:tr>
-              <a:tr h="370840">
-                <a:tc>
-                  <a:txBody>
-                    <a:bodyPr/>
-                    <a:lstStyle/>
-                    <a:p>
-                      <a:r>
-                        <a:rPr lang="fr-FR" dirty="0" smtClean="0"/>
-                        <a:t>Framework</a:t>
-                      </a:r>
-                      <a:endParaRPr lang="fr-FR" dirty="0"/>
-                    </a:p>
-                  </a:txBody>
-                  <a:tcPr/>
-                </a:tc>
-                <a:tc>
-                  <a:txBody>
-                    <a:bodyPr/>
-                    <a:lstStyle/>
-                    <a:p>
-                      <a:r>
-                        <a:rPr lang="fr-FR" dirty="0" err="1" smtClean="0"/>
-                        <a:t>Spring</a:t>
-                      </a:r>
-                      <a:r>
-                        <a:rPr lang="fr-FR" dirty="0" smtClean="0"/>
-                        <a:t> Boot </a:t>
-                      </a:r>
-                      <a:endParaRPr lang="fr-FR" dirty="0"/>
-                    </a:p>
-                  </a:txBody>
-                  <a:tcPr/>
-                </a:tc>
-                <a:tc>
-                  <a:txBody>
-                    <a:bodyPr/>
-                    <a:lstStyle/>
-                    <a:p>
-                      <a:r>
-                        <a:rPr lang="fr-FR" dirty="0" smtClean="0"/>
-                        <a:t>MVC + auto-config </a:t>
-                      </a:r>
-                      <a:endParaRPr lang="fr-FR" dirty="0"/>
-                    </a:p>
-                  </a:txBody>
-                  <a:tcPr/>
-                </a:tc>
-              </a:tr>
-              <a:tr h="370840">
-                <a:tc>
-                  <a:txBody>
-                    <a:bodyPr/>
-                    <a:lstStyle/>
-                    <a:p>
-                      <a:r>
-                        <a:rPr lang="fr-FR" sz="1800" kern="1200" dirty="0" smtClean="0">
-                          <a:solidFill>
-                            <a:schemeClr val="dk1"/>
-                          </a:solidFill>
-                          <a:effectLst/>
-                          <a:latin typeface="+mn-lt"/>
-                          <a:ea typeface="+mn-ea"/>
-                          <a:cs typeface="+mn-cs"/>
-                        </a:rPr>
-                        <a:t>Base de données</a:t>
-                      </a:r>
-                      <a:endParaRPr lang="fr-FR" dirty="0"/>
-                    </a:p>
-                  </a:txBody>
-                  <a:tcPr/>
-                </a:tc>
-                <a:tc>
-                  <a:txBody>
-                    <a:bodyPr/>
-                    <a:lstStyle/>
-                    <a:p>
-                      <a:r>
-                        <a:rPr lang="fr-FR" dirty="0" smtClean="0"/>
-                        <a:t>PostgreSQL</a:t>
-                      </a:r>
-                      <a:endParaRPr lang="fr-FR" dirty="0"/>
-                    </a:p>
-                  </a:txBody>
-                  <a:tcPr/>
-                </a:tc>
-                <a:tc>
-                  <a:txBody>
-                    <a:bodyPr/>
-                    <a:lstStyle/>
-                    <a:p>
-                      <a:r>
-                        <a:rPr lang="fr-FR" dirty="0" smtClean="0"/>
-                        <a:t> </a:t>
-                      </a:r>
-                      <a:r>
-                        <a:rPr lang="fr-FR" sz="1800" kern="1200" dirty="0" smtClean="0">
-                          <a:solidFill>
-                            <a:schemeClr val="dk1"/>
-                          </a:solidFill>
-                          <a:effectLst/>
-                          <a:latin typeface="+mn-lt"/>
-                          <a:ea typeface="+mn-ea"/>
-                          <a:cs typeface="+mn-cs"/>
-                        </a:rPr>
-                        <a:t>Garantit la cohérence des données et supporte les relations complexes </a:t>
-                      </a:r>
-                      <a:endParaRPr lang="fr-FR" dirty="0"/>
-                    </a:p>
-                  </a:txBody>
-                  <a:tcPr/>
-                </a:tc>
-              </a:tr>
-              <a:tr h="370840">
-                <a:tc>
-                  <a:txBody>
-                    <a:bodyPr/>
-                    <a:lstStyle/>
-                    <a:p>
-                      <a:r>
-                        <a:rPr lang="fr-FR" sz="1800" kern="1200" dirty="0" smtClean="0">
-                          <a:solidFill>
-                            <a:schemeClr val="dk1"/>
-                          </a:solidFill>
-                          <a:effectLst/>
-                          <a:latin typeface="+mn-lt"/>
-                          <a:ea typeface="+mn-ea"/>
-                          <a:cs typeface="+mn-cs"/>
-                        </a:rPr>
-                        <a:t>Authentification</a:t>
-                      </a:r>
-                      <a:endParaRPr lang="fr-FR" dirty="0"/>
-                    </a:p>
-                  </a:txBody>
-                  <a:tcPr/>
-                </a:tc>
-                <a:tc>
-                  <a:txBody>
-                    <a:bodyPr/>
-                    <a:lstStyle/>
-                    <a:p>
-                      <a:r>
-                        <a:rPr lang="fr-FR" sz="1800" kern="1200" dirty="0" smtClean="0">
-                          <a:solidFill>
-                            <a:schemeClr val="dk1"/>
-                          </a:solidFill>
-                          <a:effectLst/>
-                          <a:latin typeface="+mn-lt"/>
-                          <a:ea typeface="+mn-ea"/>
-                          <a:cs typeface="+mn-cs"/>
-                        </a:rPr>
-                        <a:t>JWT</a:t>
-                      </a:r>
-                      <a:endParaRPr lang="fr-FR" dirty="0"/>
-                    </a:p>
-                  </a:txBody>
-                  <a:tcPr/>
-                </a:tc>
-                <a:tc>
-                  <a:txBody>
-                    <a:bodyPr/>
-                    <a:lstStyle/>
-                    <a:p>
-                      <a:r>
-                        <a:rPr lang="fr-FR" sz="1800" kern="1200" dirty="0" smtClean="0">
-                          <a:solidFill>
-                            <a:schemeClr val="dk1"/>
-                          </a:solidFill>
-                          <a:effectLst/>
-                          <a:latin typeface="+mn-lt"/>
-                          <a:ea typeface="+mn-ea"/>
-                          <a:cs typeface="+mn-cs"/>
-                        </a:rPr>
-                        <a:t>Permet une authentification </a:t>
-                      </a:r>
-                      <a:r>
-                        <a:rPr lang="fr-FR" sz="1800" kern="1200" dirty="0" err="1" smtClean="0">
-                          <a:solidFill>
-                            <a:schemeClr val="dk1"/>
-                          </a:solidFill>
-                          <a:effectLst/>
-                          <a:latin typeface="+mn-lt"/>
-                          <a:ea typeface="+mn-ea"/>
-                          <a:cs typeface="+mn-cs"/>
-                        </a:rPr>
-                        <a:t>stateless</a:t>
-                      </a:r>
-                      <a:r>
-                        <a:rPr lang="fr-FR" sz="1800" kern="1200" dirty="0" smtClean="0">
-                          <a:solidFill>
-                            <a:schemeClr val="dk1"/>
-                          </a:solidFill>
-                          <a:effectLst/>
-                          <a:latin typeface="+mn-lt"/>
-                          <a:ea typeface="+mn-ea"/>
-                          <a:cs typeface="+mn-cs"/>
-                        </a:rPr>
-                        <a:t>, </a:t>
-                      </a:r>
-                      <a:r>
-                        <a:rPr lang="fr-FR" sz="1800" kern="1200" dirty="0" err="1" smtClean="0">
-                          <a:solidFill>
-                            <a:schemeClr val="dk1"/>
-                          </a:solidFill>
-                          <a:effectLst/>
-                          <a:latin typeface="+mn-lt"/>
-                          <a:ea typeface="+mn-ea"/>
-                          <a:cs typeface="+mn-cs"/>
-                        </a:rPr>
-                        <a:t>scalable</a:t>
-                      </a:r>
-                      <a:r>
-                        <a:rPr lang="fr-FR" sz="1800" kern="1200" dirty="0" smtClean="0">
-                          <a:solidFill>
-                            <a:schemeClr val="dk1"/>
-                          </a:solidFill>
-                          <a:effectLst/>
-                          <a:latin typeface="+mn-lt"/>
-                          <a:ea typeface="+mn-ea"/>
-                          <a:cs typeface="+mn-cs"/>
-                        </a:rPr>
-                        <a:t> et adaptée aux APIs REST modernes</a:t>
-                      </a:r>
-                      <a:endParaRPr lang="fr-FR" dirty="0"/>
-                    </a:p>
-                  </a:txBody>
-                  <a:tcPr/>
-                </a:tc>
-              </a:tr>
-              <a:tr h="370840">
-                <a:tc>
-                  <a:txBody>
-                    <a:bodyPr/>
-                    <a:lstStyle/>
-                    <a:p>
-                      <a:r>
-                        <a:rPr lang="fr-FR" dirty="0" smtClean="0"/>
-                        <a:t>Tests</a:t>
-                      </a:r>
-                      <a:endParaRPr lang="fr-FR" dirty="0"/>
-                    </a:p>
-                  </a:txBody>
-                  <a:tcPr/>
-                </a:tc>
-                <a:tc>
-                  <a:txBody>
-                    <a:bodyPr/>
-                    <a:lstStyle/>
-                    <a:p>
-                      <a:r>
-                        <a:rPr lang="fr-FR" dirty="0" smtClean="0"/>
-                        <a:t>k6 </a:t>
-                      </a:r>
-                      <a:r>
-                        <a:rPr lang="fr-FR" sz="1800" b="0" i="0" kern="1200" dirty="0" smtClean="0">
-                          <a:solidFill>
-                            <a:schemeClr val="dk1"/>
-                          </a:solidFill>
-                          <a:effectLst/>
-                          <a:latin typeface="+mn-lt"/>
-                          <a:ea typeface="+mn-ea"/>
-                          <a:cs typeface="+mn-cs"/>
-                        </a:rPr>
-                        <a:t>+ </a:t>
-                      </a:r>
-                      <a:r>
-                        <a:rPr lang="fr-FR" sz="1800" b="0" i="0" kern="1200" dirty="0" err="1" smtClean="0">
-                          <a:solidFill>
-                            <a:schemeClr val="dk1"/>
-                          </a:solidFill>
-                          <a:effectLst/>
-                          <a:latin typeface="+mn-lt"/>
-                          <a:ea typeface="+mn-ea"/>
-                          <a:cs typeface="+mn-cs"/>
-                        </a:rPr>
-                        <a:t>MockMvc</a:t>
-                      </a:r>
-                      <a:r>
-                        <a:rPr lang="fr-FR" sz="1800" b="0" i="0" kern="1200" dirty="0" smtClean="0">
-                          <a:solidFill>
-                            <a:schemeClr val="dk1"/>
-                          </a:solidFill>
-                          <a:effectLst/>
-                          <a:latin typeface="+mn-lt"/>
-                          <a:ea typeface="+mn-ea"/>
-                          <a:cs typeface="+mn-cs"/>
-                        </a:rPr>
-                        <a:t> </a:t>
-                      </a:r>
-                      <a:endParaRPr lang="fr-FR" dirty="0"/>
-                    </a:p>
-                  </a:txBody>
-                  <a:tcPr/>
-                </a:tc>
-                <a:tc>
-                  <a:txBody>
-                    <a:bodyPr/>
-                    <a:lstStyle/>
-                    <a:p>
-                      <a:r>
-                        <a:rPr lang="fr-FR" sz="1800" kern="1200" dirty="0" smtClean="0">
-                          <a:solidFill>
-                            <a:schemeClr val="dk1"/>
-                          </a:solidFill>
-                          <a:effectLst/>
-                          <a:latin typeface="+mn-lt"/>
-                          <a:ea typeface="+mn-ea"/>
-                          <a:cs typeface="+mn-cs"/>
-                        </a:rPr>
-                        <a:t>Permet de simuler des utilisateurs et d’analyser les performances des APIs REST</a:t>
-                      </a:r>
-                      <a:endParaRPr lang="fr-FR" dirty="0"/>
-                    </a:p>
-                  </a:txBody>
-                  <a:tcPr/>
-                </a:tc>
-              </a:tr>
-            </a:tbl>
-          </a:graphicData>
-        </a:graphic>
-      </p:graphicFrame>
+              <a:rPr dirty="0" err="1"/>
+              <a:t>intégrée</a:t>
+            </a:r>
+            <a:r>
+              <a:rPr dirty="0"/>
+              <a:t> </a:t>
+            </a:r>
+            <a:r>
+              <a:rPr lang="fr-FR" dirty="0" smtClean="0"/>
+              <a:t>+</a:t>
+            </a:r>
+            <a:r>
+              <a:rPr lang="fr-FR" dirty="0"/>
+              <a:t> architecture </a:t>
+            </a:r>
+            <a:r>
+              <a:rPr lang="fr-FR" dirty="0" smtClean="0"/>
+              <a:t>claire</a:t>
+            </a:r>
+            <a:endParaRPr dirty="0"/>
+          </a:p>
+          <a:p>
+            <a:r>
+              <a:rPr dirty="0"/>
+              <a:t>PostgreSQL : </a:t>
+            </a:r>
+            <a:r>
+              <a:rPr dirty="0" err="1"/>
+              <a:t>cohérence</a:t>
+            </a:r>
+            <a:r>
+              <a:rPr dirty="0"/>
+              <a:t> des </a:t>
+            </a:r>
+            <a:r>
+              <a:rPr dirty="0" err="1"/>
+              <a:t>données</a:t>
+            </a:r>
+            <a:endParaRPr dirty="0"/>
+          </a:p>
+          <a:p>
+            <a:r>
+              <a:rPr dirty="0"/>
+              <a:t>JWT : scalable et </a:t>
+            </a:r>
+            <a:r>
+              <a:rPr dirty="0" err="1"/>
+              <a:t>adapté</a:t>
+            </a:r>
+            <a:r>
+              <a:rPr dirty="0"/>
+              <a:t> aux </a:t>
+            </a:r>
+            <a:r>
+              <a:rPr dirty="0" smtClean="0"/>
+              <a:t>APIs</a:t>
+            </a:r>
+            <a:endParaRPr dirty="0"/>
+          </a:p>
+        </p:txBody>
+      </p:sp>
     </p:spTree>
     <p:extLst>
       <p:ext uri="{BB962C8B-B14F-4D97-AF65-F5344CB8AC3E}">
-        <p14:creationId xmlns:p14="http://schemas.microsoft.com/office/powerpoint/2010/main" val="1645264868"/>
+        <p14:creationId xmlns:p14="http://schemas.microsoft.com/office/powerpoint/2010/main" val="1257366188"/>
       </p:ext>
     </p:extLst>
   </p:cSld>
@@ -4940,13 +4970,13 @@
             <a:spLocks noGrp="1"/>
           </p:cNvSpPr>
           <p:nvPr>
-            <p:ph type="ctrTitle"/>
+            <p:ph type="title"/>
           </p:nvPr>
         </p:nvSpPr>
         <p:spPr>
           <a:xfrm>
-            <a:off x="685800" y="260682"/>
-            <a:ext cx="7772400" cy="1470025"/>
+            <a:off x="457200" y="20159"/>
+            <a:ext cx="8229600" cy="1143000"/>
           </a:xfrm>
         </p:spPr>
         <p:txBody>
@@ -4954,547 +4984,169 @@
           <a:lstStyle/>
           <a:p>
             <a:r>
-              <a:rPr lang="fr-FR" b="1" dirty="0" err="1"/>
-              <a:t>Stack</a:t>
-            </a:r>
-            <a:r>
-              <a:rPr lang="fr-FR" b="1" dirty="0"/>
+              <a:rPr lang="fr-FR" dirty="0"/>
+              <a:t>Outils utilisés</a:t>
+            </a:r>
+          </a:p>
+        </p:txBody>
+      </p:sp>
+      <p:sp>
+        <p:nvSpPr>
+          <p:cNvPr id="3" name="Segnaposto contenuto 2"/>
+          <p:cNvSpPr>
+            <a:spLocks noGrp="1"/>
+          </p:cNvSpPr>
+          <p:nvPr>
+            <p:ph idx="1"/>
+          </p:nvPr>
+        </p:nvSpPr>
+        <p:spPr>
+          <a:xfrm>
+            <a:off x="457200" y="1163159"/>
+            <a:ext cx="8229600" cy="5530939"/>
+          </a:xfrm>
+        </p:spPr>
+        <p:txBody>
+          <a:bodyPr>
+            <a:normAutofit fontScale="92500" lnSpcReduction="10000"/>
+          </a:bodyPr>
+          <a:lstStyle/>
+          <a:p>
+            <a:r>
+              <a:rPr lang="fr-FR" dirty="0" err="1"/>
+              <a:t>PgAdmin</a:t>
+            </a:r>
+            <a:r>
+              <a:rPr lang="fr-FR" dirty="0" smtClean="0"/>
+              <a:t>: </a:t>
+            </a:r>
+            <a:r>
+              <a:rPr lang="fr-FR" dirty="0"/>
+              <a:t>P</a:t>
+            </a:r>
+            <a:r>
+              <a:rPr lang="fr-FR" dirty="0" smtClean="0"/>
+              <a:t>ermet de visualiser </a:t>
+            </a:r>
+            <a:r>
+              <a:rPr lang="fr-FR" dirty="0"/>
+              <a:t>les tables et </a:t>
+            </a:r>
+            <a:r>
+              <a:rPr lang="fr-FR" dirty="0" smtClean="0"/>
+              <a:t>relations </a:t>
+            </a:r>
+          </a:p>
+          <a:p>
+            <a:r>
+              <a:rPr lang="fr-FR" dirty="0" smtClean="0"/>
+              <a:t>Git </a:t>
+            </a:r>
+            <a:r>
+              <a:rPr lang="fr-FR" dirty="0"/>
+              <a:t>et </a:t>
+            </a:r>
+            <a:r>
+              <a:rPr lang="fr-FR" dirty="0" err="1" smtClean="0"/>
+              <a:t>Github</a:t>
+            </a:r>
+            <a:r>
+              <a:rPr lang="fr-FR" dirty="0" smtClean="0"/>
+              <a:t>: Gestion </a:t>
+            </a:r>
+            <a:r>
+              <a:rPr lang="fr-FR" dirty="0"/>
+              <a:t>des </a:t>
+            </a:r>
+            <a:r>
+              <a:rPr lang="fr-FR" dirty="0" err="1" smtClean="0"/>
+              <a:t>versioning</a:t>
+            </a:r>
+            <a:endParaRPr lang="fr-FR" dirty="0" smtClean="0"/>
+          </a:p>
+          <a:p>
+            <a:r>
+              <a:rPr lang="fr-FR" dirty="0" smtClean="0"/>
+              <a:t>K6:Permet </a:t>
+            </a:r>
+            <a:r>
+              <a:rPr lang="fr-FR" dirty="0"/>
+              <a:t>de simuler </a:t>
+            </a:r>
+            <a:r>
+              <a:rPr lang="fr-FR" dirty="0" smtClean="0"/>
+              <a:t>plusieurs utilisateur en même temps</a:t>
+            </a:r>
+          </a:p>
+          <a:p>
+            <a:r>
+              <a:rPr lang="fr-FR" dirty="0" err="1" smtClean="0"/>
+              <a:t>Lighthouse:Permet</a:t>
+            </a:r>
+            <a:r>
+              <a:rPr lang="fr-FR" dirty="0" smtClean="0"/>
+              <a:t> de analyser </a:t>
+            </a:r>
+            <a:r>
+              <a:rPr lang="fr-FR" dirty="0"/>
+              <a:t>les performances du </a:t>
+            </a:r>
+            <a:r>
+              <a:rPr lang="fr-FR" dirty="0" err="1"/>
+              <a:t>frontend</a:t>
+            </a:r>
+            <a:endParaRPr lang="fr-FR" dirty="0" smtClean="0"/>
+          </a:p>
+          <a:p>
+            <a:r>
+              <a:rPr lang="fr-FR" dirty="0" err="1" smtClean="0"/>
+              <a:t>Swagger:Permet</a:t>
+            </a:r>
+            <a:r>
+              <a:rPr lang="fr-FR" dirty="0" smtClean="0"/>
               <a:t> </a:t>
             </a:r>
             <a:r>
-              <a:rPr lang="fr-FR" b="1" dirty="0" err="1"/>
-              <a:t>Frontend</a:t>
-            </a:r>
-            <a:r>
-              <a:rPr lang="fr-FR" b="1" dirty="0"/>
-              <a:t> + Outils</a:t>
-            </a:r>
+              <a:rPr lang="fr-FR" dirty="0"/>
+              <a:t>de générer automatiquement la documentation des </a:t>
+            </a:r>
+            <a:r>
+              <a:rPr lang="fr-FR" dirty="0" err="1"/>
+              <a:t>endpoints</a:t>
+            </a:r>
+            <a:r>
+              <a:rPr lang="fr-FR" dirty="0"/>
+              <a:t> REST</a:t>
+            </a:r>
+            <a:endParaRPr lang="fr-FR" dirty="0" smtClean="0"/>
+          </a:p>
+          <a:p>
+            <a:r>
+              <a:rPr lang="fr-FR" dirty="0" smtClean="0"/>
+              <a:t>Draw.io:Permet</a:t>
+            </a:r>
+            <a:r>
+              <a:rPr lang="fr-FR" dirty="0"/>
+              <a:t> </a:t>
+            </a:r>
+            <a:r>
+              <a:rPr lang="fr-FR" dirty="0" smtClean="0"/>
+              <a:t>de créer </a:t>
+            </a:r>
+            <a:r>
+              <a:rPr lang="fr-FR" dirty="0"/>
+              <a:t>les diagrammes de l’architecture</a:t>
+            </a:r>
+          </a:p>
+          <a:p>
             <a:endParaRPr lang="fr-FR" dirty="0"/>
           </a:p>
         </p:txBody>
       </p:sp>
-      <p:graphicFrame>
-        <p:nvGraphicFramePr>
-          <p:cNvPr id="5" name="Tabella 4"/>
-          <p:cNvGraphicFramePr>
-            <a:graphicFrameLocks noGrp="1"/>
-          </p:cNvGraphicFramePr>
-          <p:nvPr>
-            <p:extLst>
-              <p:ext uri="{D42A27DB-BD31-4B8C-83A1-F6EECF244321}">
-                <p14:modId xmlns:p14="http://schemas.microsoft.com/office/powerpoint/2010/main" val="69297173"/>
-              </p:ext>
-            </p:extLst>
-          </p:nvPr>
-        </p:nvGraphicFramePr>
-        <p:xfrm>
-          <a:off x="457200" y="1600200"/>
-          <a:ext cx="8229600" cy="3850640"/>
-        </p:xfrm>
-        <a:graphic>
-          <a:graphicData uri="http://schemas.openxmlformats.org/drawingml/2006/table">
-            <a:tbl>
-              <a:tblPr firstRow="1" bandRow="1">
-                <a:tableStyleId>{5C22544A-7EE6-4342-B048-85BDC9FD1C3A}</a:tableStyleId>
-              </a:tblPr>
-              <a:tblGrid>
-                <a:gridCol w="2743200"/>
-                <a:gridCol w="2743200"/>
-                <a:gridCol w="2743200"/>
-              </a:tblGrid>
-              <a:tr h="370840">
-                <a:tc>
-                  <a:txBody>
-                    <a:bodyPr/>
-                    <a:lstStyle/>
-                    <a:p>
-                      <a:r>
-                        <a:rPr lang="fr-FR" dirty="0" smtClean="0"/>
-                        <a:t>Composant </a:t>
-                      </a:r>
-                      <a:endParaRPr lang="fr-FR" dirty="0"/>
-                    </a:p>
-                  </a:txBody>
-                  <a:tcPr/>
-                </a:tc>
-                <a:tc>
-                  <a:txBody>
-                    <a:bodyPr/>
-                    <a:lstStyle/>
-                    <a:p>
-                      <a:r>
-                        <a:rPr lang="fr-FR" dirty="0" smtClean="0"/>
-                        <a:t>Technologie </a:t>
-                      </a:r>
-                      <a:endParaRPr lang="fr-FR" dirty="0"/>
-                    </a:p>
-                  </a:txBody>
-                  <a:tcPr/>
-                </a:tc>
-                <a:tc>
-                  <a:txBody>
-                    <a:bodyPr/>
-                    <a:lstStyle/>
-                    <a:p>
-                      <a:r>
-                        <a:rPr lang="fr-FR" dirty="0" smtClean="0"/>
-                        <a:t>Justification</a:t>
-                      </a:r>
-                      <a:endParaRPr lang="fr-FR" dirty="0"/>
-                    </a:p>
-                  </a:txBody>
-                  <a:tcPr/>
-                </a:tc>
-              </a:tr>
-              <a:tr h="370840">
-                <a:tc>
-                  <a:txBody>
-                    <a:bodyPr/>
-                    <a:lstStyle/>
-                    <a:p>
-                      <a:r>
-                        <a:rPr kumimoji="0" lang="fr-FR" sz="1800" b="0" i="0" u="none" strike="noStrike" kern="1200" cap="none" spc="0" normalizeH="0" baseline="0" noProof="0" dirty="0" smtClean="0">
-                          <a:ln>
-                            <a:noFill/>
-                          </a:ln>
-                          <a:solidFill>
-                            <a:prstClr val="black"/>
-                          </a:solidFill>
-                          <a:effectLst/>
-                          <a:uLnTx/>
-                          <a:uFillTx/>
-                          <a:latin typeface="+mn-lt"/>
-                          <a:ea typeface="+mn-ea"/>
-                          <a:cs typeface="+mn-cs"/>
-                        </a:rPr>
-                        <a:t>Langage</a:t>
-                      </a:r>
-                      <a:endParaRPr lang="fr-FR" dirty="0"/>
-                    </a:p>
-                  </a:txBody>
-                  <a:tcPr/>
-                </a:tc>
-                <a:tc>
-                  <a:txBody>
-                    <a:bodyPr/>
-                    <a:lstStyle/>
-                    <a:p>
-                      <a:r>
-                        <a:rPr lang="fr-FR" sz="1800" b="0" i="0" kern="1200" dirty="0" err="1" smtClean="0">
-                          <a:solidFill>
-                            <a:schemeClr val="dk1"/>
-                          </a:solidFill>
-                          <a:effectLst/>
-                          <a:latin typeface="+mn-lt"/>
-                          <a:ea typeface="+mn-ea"/>
-                          <a:cs typeface="+mn-cs"/>
-                        </a:rPr>
-                        <a:t>TypeScript</a:t>
-                      </a:r>
-                      <a:endParaRPr lang="fr-FR" dirty="0"/>
-                    </a:p>
-                  </a:txBody>
-                  <a:tcPr/>
-                </a:tc>
-                <a:tc>
-                  <a:txBody>
-                    <a:bodyPr/>
-                    <a:lstStyle/>
-                    <a:p>
-                      <a:r>
-                        <a:rPr lang="fr-FR" sz="1800" b="0" i="0" kern="1200" dirty="0" smtClean="0">
-                          <a:solidFill>
-                            <a:schemeClr val="dk1"/>
-                          </a:solidFill>
-                          <a:effectLst/>
-                          <a:latin typeface="+mn-lt"/>
-                          <a:ea typeface="+mn-ea"/>
-                          <a:cs typeface="+mn-cs"/>
-                        </a:rPr>
-                        <a:t>Typage statique</a:t>
-                      </a:r>
-                      <a:endParaRPr lang="fr-FR" dirty="0"/>
-                    </a:p>
-                  </a:txBody>
-                  <a:tcPr/>
-                </a:tc>
-              </a:tr>
-              <a:tr h="370840">
-                <a:tc>
-                  <a:txBody>
-                    <a:bodyPr/>
-                    <a:lstStyle/>
-                    <a:p>
-                      <a:r>
-                        <a:rPr lang="fr-FR" dirty="0" smtClean="0"/>
-                        <a:t>Framework</a:t>
-                      </a:r>
-                      <a:endParaRPr lang="fr-FR" dirty="0"/>
-                    </a:p>
-                  </a:txBody>
-                  <a:tcPr/>
-                </a:tc>
-                <a:tc>
-                  <a:txBody>
-                    <a:bodyPr/>
-                    <a:lstStyle/>
-                    <a:p>
-                      <a:r>
-                        <a:rPr lang="fr-FR" sz="1800" b="0" i="0" kern="1200" dirty="0" err="1" smtClean="0">
-                          <a:solidFill>
-                            <a:schemeClr val="dk1"/>
-                          </a:solidFill>
-                          <a:effectLst/>
-                          <a:latin typeface="+mn-lt"/>
-                          <a:ea typeface="+mn-ea"/>
-                          <a:cs typeface="+mn-cs"/>
-                        </a:rPr>
-                        <a:t>Angular</a:t>
-                      </a:r>
-                      <a:r>
-                        <a:rPr lang="fr-FR" sz="1800" b="0" i="0" kern="1200" dirty="0" smtClean="0">
-                          <a:solidFill>
-                            <a:schemeClr val="dk1"/>
-                          </a:solidFill>
-                          <a:effectLst/>
-                          <a:latin typeface="+mn-lt"/>
-                          <a:ea typeface="+mn-ea"/>
-                          <a:cs typeface="+mn-cs"/>
-                        </a:rPr>
-                        <a:t> </a:t>
-                      </a:r>
-                      <a:endParaRPr lang="fr-FR" dirty="0"/>
-                    </a:p>
-                  </a:txBody>
-                  <a:tcPr/>
-                </a:tc>
-                <a:tc>
-                  <a:txBody>
-                    <a:bodyPr/>
-                    <a:lstStyle/>
-                    <a:p>
-                      <a:r>
-                        <a:rPr lang="fr-FR" sz="1800" b="0" i="0" kern="1200" dirty="0" smtClean="0">
-                          <a:solidFill>
-                            <a:schemeClr val="dk1"/>
-                          </a:solidFill>
-                          <a:effectLst/>
-                          <a:latin typeface="+mn-lt"/>
-                          <a:ea typeface="+mn-ea"/>
-                          <a:cs typeface="+mn-cs"/>
-                        </a:rPr>
-                        <a:t>Architecture des fichier claire et structuré</a:t>
-                      </a:r>
-                      <a:endParaRPr lang="fr-FR" dirty="0"/>
-                    </a:p>
-                  </a:txBody>
-                  <a:tcPr/>
-                </a:tc>
-              </a:tr>
-              <a:tr h="370840">
-                <a:tc>
-                  <a:txBody>
-                    <a:bodyPr/>
-                    <a:lstStyle/>
-                    <a:p>
-                      <a:r>
-                        <a:rPr lang="fr-FR" sz="1800" kern="1200" dirty="0" smtClean="0">
-                          <a:solidFill>
-                            <a:schemeClr val="dk1"/>
-                          </a:solidFill>
-                          <a:effectLst/>
-                          <a:latin typeface="+mn-lt"/>
-                          <a:ea typeface="+mn-ea"/>
-                          <a:cs typeface="+mn-cs"/>
-                        </a:rPr>
-                        <a:t>Performance </a:t>
-                      </a:r>
-                      <a:endParaRPr lang="fr-FR" dirty="0"/>
-                    </a:p>
-                  </a:txBody>
-                  <a:tcPr/>
-                </a:tc>
-                <a:tc>
-                  <a:txBody>
-                    <a:bodyPr/>
-                    <a:lstStyle/>
-                    <a:p>
-                      <a:r>
-                        <a:rPr lang="fr-FR" sz="1800" b="0" i="0" kern="1200" dirty="0" smtClean="0">
-                          <a:solidFill>
-                            <a:schemeClr val="dk1"/>
-                          </a:solidFill>
-                          <a:effectLst/>
-                          <a:latin typeface="+mn-lt"/>
-                          <a:ea typeface="+mn-ea"/>
-                          <a:cs typeface="+mn-cs"/>
-                        </a:rPr>
-                        <a:t>Lighthouse</a:t>
-                      </a:r>
-                      <a:endParaRPr lang="fr-FR" dirty="0"/>
-                    </a:p>
-                  </a:txBody>
-                  <a:tcPr/>
-                </a:tc>
-                <a:tc>
-                  <a:txBody>
-                    <a:bodyPr/>
-                    <a:lstStyle/>
-                    <a:p>
-                      <a:r>
-                        <a:rPr lang="fr-FR" dirty="0" smtClean="0"/>
-                        <a:t>Permet de vérifier la performance de site</a:t>
-                      </a:r>
-                      <a:endParaRPr lang="fr-FR" dirty="0"/>
-                    </a:p>
-                  </a:txBody>
-                  <a:tcPr/>
-                </a:tc>
-              </a:tr>
-              <a:tr h="370840">
-                <a:tc>
-                  <a:txBody>
-                    <a:bodyPr/>
-                    <a:lstStyle/>
-                    <a:p>
-                      <a:r>
-                        <a:rPr lang="fr-FR" sz="1800" b="0" i="0" kern="1200" dirty="0" smtClean="0">
-                          <a:solidFill>
-                            <a:schemeClr val="dk1"/>
-                          </a:solidFill>
-                          <a:effectLst/>
-                          <a:latin typeface="+mn-lt"/>
-                          <a:ea typeface="+mn-ea"/>
-                          <a:cs typeface="+mn-cs"/>
-                        </a:rPr>
-                        <a:t>IDE </a:t>
-                      </a:r>
-                      <a:endParaRPr lang="fr-FR" dirty="0"/>
-                    </a:p>
-                  </a:txBody>
-                  <a:tcPr/>
-                </a:tc>
-                <a:tc>
-                  <a:txBody>
-                    <a:bodyPr/>
-                    <a:lstStyle/>
-                    <a:p>
-                      <a:r>
-                        <a:rPr lang="fr-FR" dirty="0" smtClean="0"/>
-                        <a:t>VS code et </a:t>
-                      </a:r>
-                      <a:r>
-                        <a:rPr lang="fr-FR" dirty="0" err="1" smtClean="0"/>
-                        <a:t>EClipse</a:t>
-                      </a:r>
-                      <a:endParaRPr lang="fr-FR" dirty="0"/>
-                    </a:p>
-                  </a:txBody>
-                  <a:tcPr/>
-                </a:tc>
-                <a:tc>
-                  <a:txBody>
-                    <a:bodyPr/>
-                    <a:lstStyle/>
-                    <a:p>
-                      <a:r>
-                        <a:rPr lang="fr-FR" sz="1800" kern="1200" dirty="0" smtClean="0">
-                          <a:solidFill>
-                            <a:schemeClr val="dk1"/>
-                          </a:solidFill>
-                          <a:effectLst/>
-                          <a:latin typeface="+mn-lt"/>
-                          <a:ea typeface="+mn-ea"/>
-                          <a:cs typeface="+mn-cs"/>
-                        </a:rPr>
-                        <a:t>Outils </a:t>
-                      </a:r>
-                      <a:r>
-                        <a:rPr lang="fr-FR" sz="1800" kern="1200" dirty="0" err="1" smtClean="0">
-                          <a:solidFill>
-                            <a:schemeClr val="dk1"/>
-                          </a:solidFill>
-                          <a:effectLst/>
-                          <a:latin typeface="+mn-lt"/>
-                          <a:ea typeface="+mn-ea"/>
-                          <a:cs typeface="+mn-cs"/>
-                        </a:rPr>
-                        <a:t>complete</a:t>
-                      </a:r>
-                      <a:r>
-                        <a:rPr lang="fr-FR" sz="1800" kern="1200" dirty="0" smtClean="0">
-                          <a:solidFill>
-                            <a:schemeClr val="dk1"/>
-                          </a:solidFill>
-                          <a:effectLst/>
-                          <a:latin typeface="+mn-lt"/>
-                          <a:ea typeface="+mn-ea"/>
-                          <a:cs typeface="+mn-cs"/>
-                        </a:rPr>
-                        <a:t> avec </a:t>
-                      </a:r>
-                      <a:r>
-                        <a:rPr lang="fr-FR" sz="1800" kern="1200" dirty="0" err="1" smtClean="0">
-                          <a:solidFill>
-                            <a:schemeClr val="dk1"/>
-                          </a:solidFill>
-                          <a:effectLst/>
-                          <a:latin typeface="+mn-lt"/>
-                          <a:ea typeface="+mn-ea"/>
-                          <a:cs typeface="+mn-cs"/>
-                        </a:rPr>
-                        <a:t>autocomplétion</a:t>
-                      </a:r>
-                      <a:r>
-                        <a:rPr lang="fr-FR" sz="1800" kern="1200" dirty="0" smtClean="0">
-                          <a:solidFill>
-                            <a:schemeClr val="dk1"/>
-                          </a:solidFill>
-                          <a:effectLst/>
-                          <a:latin typeface="+mn-lt"/>
-                          <a:ea typeface="+mn-ea"/>
-                          <a:cs typeface="+mn-cs"/>
-                        </a:rPr>
-                        <a:t>, </a:t>
-                      </a:r>
-                      <a:r>
-                        <a:rPr lang="fr-FR" sz="1800" kern="1200" dirty="0" err="1" smtClean="0">
-                          <a:solidFill>
-                            <a:schemeClr val="dk1"/>
-                          </a:solidFill>
-                          <a:effectLst/>
-                          <a:latin typeface="+mn-lt"/>
-                          <a:ea typeface="+mn-ea"/>
-                          <a:cs typeface="+mn-cs"/>
-                        </a:rPr>
-                        <a:t>debug</a:t>
-                      </a:r>
-                      <a:r>
-                        <a:rPr lang="fr-FR" sz="1800" kern="1200" dirty="0" smtClean="0">
-                          <a:solidFill>
-                            <a:schemeClr val="dk1"/>
-                          </a:solidFill>
-                          <a:effectLst/>
-                          <a:latin typeface="+mn-lt"/>
-                          <a:ea typeface="+mn-ea"/>
-                          <a:cs typeface="+mn-cs"/>
-                        </a:rPr>
-                        <a:t> avancé et support natif Java/</a:t>
-                      </a:r>
-                      <a:r>
-                        <a:rPr lang="fr-FR" sz="1800" kern="1200" dirty="0" err="1" smtClean="0">
-                          <a:solidFill>
-                            <a:schemeClr val="dk1"/>
-                          </a:solidFill>
-                          <a:effectLst/>
-                          <a:latin typeface="+mn-lt"/>
-                          <a:ea typeface="+mn-ea"/>
-                          <a:cs typeface="+mn-cs"/>
-                        </a:rPr>
-                        <a:t>TypeScript</a:t>
-                      </a:r>
-                      <a:endParaRPr lang="fr-FR" dirty="0"/>
-                    </a:p>
-                  </a:txBody>
-                  <a:tcPr/>
-                </a:tc>
-              </a:tr>
-              <a:tr h="370840">
-                <a:tc>
-                  <a:txBody>
-                    <a:bodyPr/>
-                    <a:lstStyle/>
-                    <a:p>
-                      <a:r>
-                        <a:rPr lang="fr-FR" sz="1800" b="0" i="0" kern="1200" dirty="0" smtClean="0">
-                          <a:solidFill>
-                            <a:schemeClr val="dk1"/>
-                          </a:solidFill>
-                          <a:effectLst/>
-                          <a:latin typeface="+mn-lt"/>
-                          <a:ea typeface="+mn-ea"/>
-                          <a:cs typeface="+mn-cs"/>
-                        </a:rPr>
-                        <a:t>Tests </a:t>
-                      </a:r>
-                      <a:endParaRPr lang="fr-FR" dirty="0"/>
-                    </a:p>
-                  </a:txBody>
-                  <a:tcPr/>
-                </a:tc>
-                <a:tc>
-                  <a:txBody>
-                    <a:bodyPr/>
-                    <a:lstStyle/>
-                    <a:p>
-                      <a:r>
-                        <a:rPr lang="fr-FR" dirty="0" smtClean="0"/>
-                        <a:t>Jasmine</a:t>
-                      </a:r>
-                      <a:r>
-                        <a:rPr lang="fr-FR" baseline="0" dirty="0" smtClean="0"/>
-                        <a:t> et karma</a:t>
-                      </a:r>
-                      <a:endParaRPr lang="fr-FR" dirty="0"/>
-                    </a:p>
-                  </a:txBody>
-                  <a:tcPr/>
-                </a:tc>
-                <a:tc>
-                  <a:txBody>
-                    <a:bodyPr/>
-                    <a:lstStyle/>
-                    <a:p>
-                      <a:r>
-                        <a:rPr lang="fr-FR" sz="1800" b="0" i="0" kern="1200" dirty="0" smtClean="0">
-                          <a:solidFill>
-                            <a:schemeClr val="dk1"/>
-                          </a:solidFill>
-                          <a:effectLst/>
-                          <a:latin typeface="+mn-lt"/>
-                          <a:ea typeface="+mn-ea"/>
-                          <a:cs typeface="+mn-cs"/>
-                        </a:rPr>
-                        <a:t>Framework natif </a:t>
-                      </a:r>
-                      <a:r>
-                        <a:rPr lang="fr-FR" sz="1800" b="0" i="0" kern="1200" dirty="0" err="1" smtClean="0">
-                          <a:solidFill>
-                            <a:schemeClr val="dk1"/>
-                          </a:solidFill>
-                          <a:effectLst/>
-                          <a:latin typeface="+mn-lt"/>
-                          <a:ea typeface="+mn-ea"/>
-                          <a:cs typeface="+mn-cs"/>
-                        </a:rPr>
-                        <a:t>Angular</a:t>
-                      </a:r>
-                      <a:r>
-                        <a:rPr lang="fr-FR" sz="1800" b="0" i="0" kern="1200" dirty="0" smtClean="0">
-                          <a:solidFill>
-                            <a:schemeClr val="dk1"/>
-                          </a:solidFill>
-                          <a:effectLst/>
-                          <a:latin typeface="+mn-lt"/>
-                          <a:ea typeface="+mn-ea"/>
-                          <a:cs typeface="+mn-cs"/>
-                        </a:rPr>
-                        <a:t> CLI</a:t>
-                      </a:r>
-                      <a:endParaRPr lang="fr-FR" dirty="0"/>
-                    </a:p>
-                  </a:txBody>
-                  <a:tcPr/>
-                </a:tc>
-              </a:tr>
-            </a:tbl>
-          </a:graphicData>
-        </a:graphic>
-      </p:graphicFrame>
     </p:spTree>
     <p:extLst>
       <p:ext uri="{BB962C8B-B14F-4D97-AF65-F5344CB8AC3E}">
-        <p14:creationId xmlns:p14="http://schemas.microsoft.com/office/powerpoint/2010/main" val="2814299430"/>
+        <p14:creationId xmlns:p14="http://schemas.microsoft.com/office/powerpoint/2010/main" val="69947947"/>
       </p:ext>
     </p:extLst>
   </p:cSld>
@@ -5610,10 +5262,8 @@
           <a:lstStyle/>
           <a:p>
             <a:r>
-              <a:rPr dirty="0" err="1"/>
-              <a:t>Sécurité</a:t>
-            </a:r>
-            <a:endParaRPr dirty="0"/>
+              <a:t>Flux de données</a:t>
+            </a:r>
           </a:p>
         </p:txBody>
       </p:sp>
@@ -5629,153 +5279,41 @@
         </p:nvSpPr>
         <p:spPr/>
         <p:txBody>
-          <a:bodyPr>
-            <a:normAutofit/>
-          </a:bodyPr>
-          <a:lstStyle/>
-          <a:p>
-            <a:pPr marL="0" indent="0">
-              <a:buNone/>
-            </a:pPr>
-            <a:r>
-              <a:rPr lang="fr-FR" dirty="0">
-                <a:solidFill>
-                  <a:srgbClr val="FF0000"/>
-                </a:solidFill>
-              </a:rPr>
-              <a:t>Mesures </a:t>
-            </a:r>
-            <a:r>
-              <a:rPr lang="fr-FR" dirty="0" smtClean="0">
-                <a:solidFill>
-                  <a:srgbClr val="FF0000"/>
-                </a:solidFill>
-              </a:rPr>
-              <a:t>implémentées:</a:t>
-            </a:r>
-            <a:endParaRPr lang="fr-FR" dirty="0">
-              <a:solidFill>
-                <a:srgbClr val="FF0000"/>
-              </a:solidFill>
-            </a:endParaRPr>
-          </a:p>
-          <a:p>
-            <a:pPr marL="0" indent="0">
-              <a:buNone/>
-            </a:pPr>
-            <a:r>
-              <a:rPr lang="fr-FR" sz="2800" dirty="0"/>
-              <a:t>• JWT + </a:t>
-            </a:r>
-            <a:r>
-              <a:rPr lang="fr-FR" sz="2800" dirty="0" err="1"/>
-              <a:t>Spring</a:t>
-            </a:r>
-            <a:r>
-              <a:rPr lang="fr-FR" sz="2800" dirty="0"/>
-              <a:t> Security</a:t>
-            </a:r>
-          </a:p>
-          <a:p>
-            <a:pPr marL="0" indent="0">
-              <a:buNone/>
-            </a:pPr>
-            <a:r>
-              <a:rPr lang="fr-FR" sz="2800" dirty="0"/>
-              <a:t>• </a:t>
-            </a:r>
-            <a:r>
-              <a:rPr lang="fr-FR" sz="2800" dirty="0" err="1"/>
-              <a:t>BCrypt</a:t>
-            </a:r>
-            <a:r>
-              <a:rPr lang="fr-FR" sz="2800" dirty="0"/>
-              <a:t> hash </a:t>
-            </a:r>
-            <a:r>
-              <a:rPr lang="fr-FR" sz="2800" dirty="0" err="1"/>
-              <a:t>passwords</a:t>
-            </a:r>
-            <a:endParaRPr lang="fr-FR" sz="2800" dirty="0"/>
-          </a:p>
-          <a:p>
-            <a:pPr marL="0" indent="0">
-              <a:buNone/>
-            </a:pPr>
-            <a:r>
-              <a:rPr lang="fr-FR" sz="2800" dirty="0"/>
-              <a:t>• Validation inputs (anti-injection)</a:t>
-            </a:r>
-          </a:p>
-          <a:p>
-            <a:pPr marL="0" indent="0">
-              <a:buNone/>
-            </a:pPr>
-            <a:r>
-              <a:rPr lang="fr-FR" sz="2800" dirty="0"/>
-              <a:t>• Block extensions (.</a:t>
-            </a:r>
-            <a:r>
-              <a:rPr lang="fr-FR" sz="2800" dirty="0" err="1"/>
-              <a:t>exe</a:t>
-            </a:r>
-            <a:r>
-              <a:rPr lang="fr-FR" sz="2800" dirty="0"/>
-              <a:t>, .bat, .cmd)</a:t>
-            </a:r>
-          </a:p>
-          <a:p>
-            <a:pPr marL="0" indent="0">
-              <a:buNone/>
-            </a:pPr>
-            <a:r>
-              <a:rPr lang="fr-FR" sz="2800" dirty="0"/>
-              <a:t>• HTTPS + CORS sécurisé</a:t>
-            </a:r>
-          </a:p>
-          <a:p>
-            <a:pPr marL="0" indent="0">
-              <a:buNone/>
-            </a:pPr>
-            <a:r>
-              <a:rPr lang="fr-FR" sz="2800" dirty="0"/>
-              <a:t>• </a:t>
-            </a:r>
-            <a:r>
-              <a:rPr lang="fr-FR" sz="2800" dirty="0" err="1"/>
-              <a:t>AuthGuard</a:t>
-            </a:r>
-            <a:r>
-              <a:rPr lang="fr-FR" sz="2800" dirty="0"/>
-              <a:t> </a:t>
-            </a:r>
-            <a:r>
-              <a:rPr lang="fr-FR" sz="2800" dirty="0" err="1"/>
-              <a:t>frontend</a:t>
-            </a:r>
-            <a:endParaRPr lang="fr-FR" sz="2800" dirty="0"/>
-          </a:p>
-          <a:p>
-            <a:pPr marL="0" indent="0">
-              <a:buNone/>
-            </a:pPr>
-            <a:r>
-              <a:rPr lang="fr-FR" sz="2800" dirty="0"/>
-              <a:t>• </a:t>
-            </a:r>
-            <a:r>
-              <a:rPr lang="fr-FR" sz="2800" dirty="0" err="1"/>
-              <a:t>Tokens</a:t>
-            </a:r>
-            <a:r>
-              <a:rPr lang="fr-FR" sz="2800" dirty="0"/>
-              <a:t> expirants</a:t>
-            </a:r>
-            <a:endParaRPr sz="2800" dirty="0"/>
+          <a:bodyPr/>
+          <a:lstStyle/>
+          <a:p>
+            <a:r>
+              <a:t>Utilisateur → Frontend</a:t>
+            </a:r>
+          </a:p>
+          <a:p>
+            <a:r>
+              <a:t>Frontend → API (requêtes HTTP)</a:t>
+            </a:r>
+          </a:p>
+          <a:p>
+            <a:r>
+              <a:t>API → Backend (traitement)</a:t>
+            </a:r>
+          </a:p>
+          <a:p>
+            <a:r>
+              <a:t>Backend → DB (stockage)</a:t>
+            </a:r>
+          </a:p>
+          <a:p>
+            <a:r>
+              <a:t>Réponse → Frontend → Utilisateur</a:t>
+            </a:r>
           </a:p>
         </p:txBody>
       </p:sp>
     </p:spTree>
+    <p:extLst>
+      <p:ext uri="{BB962C8B-B14F-4D97-AF65-F5344CB8AC3E}">
+        <p14:creationId xmlns:p14="http://schemas.microsoft.com/office/powerpoint/2010/main" val="489246744"/>
+      </p:ext>
+    </p:extLst>
   </p:cSld>
   <p:clrMapOvr>
     <a:masterClrMapping/>

--- a/DataShare_Presentation.pptx
+++ b/DataShare_Presentation.pptx
@@ -319,7 +319,7 @@
           <a:p>
             <a:fld id="{5BCAD085-E8A6-8845-BD4E-CB4CCA059FC4}" type="datetimeFigureOut">
               <a:rPr lang="en-US" smtClean="0"/>
-              <a:t>5/2/2026</a:t>
+              <a:t>5/4/2026</a:t>
             </a:fld>
             <a:endParaRPr lang="en-US"/>
           </a:p>
@@ -489,7 +489,7 @@
           <a:p>
             <a:fld id="{5BCAD085-E8A6-8845-BD4E-CB4CCA059FC4}" type="datetimeFigureOut">
               <a:rPr lang="en-US" smtClean="0"/>
-              <a:t>5/2/2026</a:t>
+              <a:t>5/4/2026</a:t>
             </a:fld>
             <a:endParaRPr lang="en-US"/>
           </a:p>
@@ -669,7 +669,7 @@
           <a:p>
             <a:fld id="{5BCAD085-E8A6-8845-BD4E-CB4CCA059FC4}" type="datetimeFigureOut">
               <a:rPr lang="en-US" smtClean="0"/>
-              <a:t>5/2/2026</a:t>
+              <a:t>5/4/2026</a:t>
             </a:fld>
             <a:endParaRPr lang="en-US"/>
           </a:p>
@@ -839,7 +839,7 @@
           <a:p>
             <a:fld id="{5BCAD085-E8A6-8845-BD4E-CB4CCA059FC4}" type="datetimeFigureOut">
               <a:rPr lang="en-US" smtClean="0"/>
-              <a:t>5/2/2026</a:t>
+              <a:t>5/4/2026</a:t>
             </a:fld>
             <a:endParaRPr lang="en-US"/>
           </a:p>
@@ -1085,7 +1085,7 @@
           <a:p>
             <a:fld id="{5BCAD085-E8A6-8845-BD4E-CB4CCA059FC4}" type="datetimeFigureOut">
               <a:rPr lang="en-US" smtClean="0"/>
-              <a:t>5/2/2026</a:t>
+              <a:t>5/4/2026</a:t>
             </a:fld>
             <a:endParaRPr lang="en-US"/>
           </a:p>
@@ -1373,7 +1373,7 @@
           <a:p>
             <a:fld id="{5BCAD085-E8A6-8845-BD4E-CB4CCA059FC4}" type="datetimeFigureOut">
               <a:rPr lang="en-US" smtClean="0"/>
-              <a:t>5/2/2026</a:t>
+              <a:t>5/4/2026</a:t>
             </a:fld>
             <a:endParaRPr lang="en-US"/>
           </a:p>
@@ -1795,7 +1795,7 @@
           <a:p>
             <a:fld id="{5BCAD085-E8A6-8845-BD4E-CB4CCA059FC4}" type="datetimeFigureOut">
               <a:rPr lang="en-US" smtClean="0"/>
-              <a:t>5/2/2026</a:t>
+              <a:t>5/4/2026</a:t>
             </a:fld>
             <a:endParaRPr lang="en-US"/>
           </a:p>
@@ -1913,7 +1913,7 @@
           <a:p>
             <a:fld id="{5BCAD085-E8A6-8845-BD4E-CB4CCA059FC4}" type="datetimeFigureOut">
               <a:rPr lang="en-US" smtClean="0"/>
-              <a:t>5/2/2026</a:t>
+              <a:t>5/4/2026</a:t>
             </a:fld>
             <a:endParaRPr lang="en-US"/>
           </a:p>
@@ -2008,7 +2008,7 @@
           <a:p>
             <a:fld id="{5BCAD085-E8A6-8845-BD4E-CB4CCA059FC4}" type="datetimeFigureOut">
               <a:rPr lang="en-US" smtClean="0"/>
-              <a:t>5/2/2026</a:t>
+              <a:t>5/4/2026</a:t>
             </a:fld>
             <a:endParaRPr lang="en-US"/>
           </a:p>
@@ -2285,7 +2285,7 @@
           <a:p>
             <a:fld id="{5BCAD085-E8A6-8845-BD4E-CB4CCA059FC4}" type="datetimeFigureOut">
               <a:rPr lang="en-US" smtClean="0"/>
-              <a:t>5/2/2026</a:t>
+              <a:t>5/4/2026</a:t>
             </a:fld>
             <a:endParaRPr lang="en-US"/>
           </a:p>
@@ -2538,7 +2538,7 @@
           <a:p>
             <a:fld id="{5BCAD085-E8A6-8845-BD4E-CB4CCA059FC4}" type="datetimeFigureOut">
               <a:rPr lang="en-US" smtClean="0"/>
-              <a:t>5/2/2026</a:t>
+              <a:t>5/4/2026</a:t>
             </a:fld>
             <a:endParaRPr lang="en-US"/>
           </a:p>
@@ -2751,7 +2751,7 @@
           <a:p>
             <a:fld id="{5BCAD085-E8A6-8845-BD4E-CB4CCA059FC4}" type="datetimeFigureOut">
               <a:rPr lang="en-US" smtClean="0"/>
-              <a:t>5/2/2026</a:t>
+              <a:t>5/4/2026</a:t>
             </a:fld>
             <a:endParaRPr lang="en-US"/>
           </a:p>
@@ -4395,7 +4395,15 @@
           <a:p>
             <a:r>
               <a:rPr lang="fr-FR" dirty="0"/>
-              <a:t>Besoin : partager des fichiers rapidement et en sécurité</a:t>
+              <a:t>Besoin : </a:t>
+            </a:r>
+            <a:r>
+              <a:rPr lang="fr-FR" dirty="0" smtClean="0"/>
+              <a:t>Partager </a:t>
+            </a:r>
+            <a:r>
+              <a:rPr lang="fr-FR" dirty="0"/>
+              <a:t>des fichiers rapidement et en sécurité</a:t>
             </a:r>
           </a:p>
           <a:p>
@@ -4405,7 +4413,19 @@
             </a:r>
             <a:r>
               <a:rPr lang="fr-FR" dirty="0" smtClean="0"/>
-              <a:t>: Obligation de être inscrit pour pouvoir télécharger les fichiers</a:t>
+              <a:t>: </a:t>
+            </a:r>
+            <a:r>
+              <a:rPr lang="fr-FR" smtClean="0"/>
+              <a:t>Obligation </a:t>
+            </a:r>
+            <a:r>
+              <a:rPr lang="fr-FR" smtClean="0"/>
+              <a:t>d’être </a:t>
+            </a:r>
+            <a:r>
+              <a:rPr lang="fr-FR" dirty="0" smtClean="0"/>
+              <a:t>inscrit pour pouvoir télécharger les fichiers</a:t>
             </a:r>
           </a:p>
           <a:p>
